--- a/Semester_3/math/meet-7/7 Pengantar - Skalar dan Besaran Vektor.pptx
+++ b/Semester_3/math/meet-7/7 Pengantar - Skalar dan Besaran Vektor.pptx
@@ -1,22 +1,22 @@
 
 <file path=ppt/presentation.xml><?xml version="1.0" encoding="utf-8"?>
-<p:presentation xmlns:a="http://schemas.openxmlformats.org/drawingml/2006/main" xmlns:r="http://schemas.openxmlformats.org/officeDocument/2006/relationships" xmlns:p="http://schemas.openxmlformats.org/presentationml/2006/main" saveSubsetFonts="1">
+<p:presentation xmlns:a="http://schemas.openxmlformats.org/drawingml/2006/main" xmlns:r="http://schemas.openxmlformats.org/officeDocument/2006/relationships" xmlns:p="http://schemas.openxmlformats.org/presentationml/2006/main">
   <p:sldMasterIdLst>
-    <p:sldMasterId id="2147483651" r:id="rId1"/>
-    <p:sldMasterId id="2147483653" r:id="rId2"/>
+    <p:sldMasterId id="2147483648" r:id="rId1"/>
+    <p:sldMasterId id="2147483665" r:id="rId3"/>
   </p:sldMasterIdLst>
   <p:sldIdLst>
-    <p:sldId id="264" r:id="rId3"/>
-    <p:sldId id="302" r:id="rId4"/>
-    <p:sldId id="299" r:id="rId5"/>
-    <p:sldId id="300" r:id="rId6"/>
-    <p:sldId id="301" r:id="rId7"/>
-    <p:sldId id="303" r:id="rId8"/>
-    <p:sldId id="304" r:id="rId9"/>
-    <p:sldId id="306" r:id="rId10"/>
-    <p:sldId id="305" r:id="rId11"/>
-    <p:sldId id="308" r:id="rId12"/>
-    <p:sldId id="307" r:id="rId13"/>
+    <p:sldId id="264" r:id="rId4"/>
+    <p:sldId id="302" r:id="rId5"/>
+    <p:sldId id="299" r:id="rId6"/>
+    <p:sldId id="300" r:id="rId7"/>
+    <p:sldId id="301" r:id="rId8"/>
+    <p:sldId id="303" r:id="rId9"/>
+    <p:sldId id="304" r:id="rId10"/>
+    <p:sldId id="306" r:id="rId11"/>
+    <p:sldId id="305" r:id="rId12"/>
+    <p:sldId id="308" r:id="rId13"/>
+    <p:sldId id="307" r:id="rId14"/>
   </p:sldIdLst>
   <p:sldSz cx="9144000" cy="5143500" type="screen16x9"/>
   <p:notesSz cx="6858000" cy="9144000"/>
@@ -115,22 +115,6 @@
       </a:defRPr>
     </a:lvl9pPr>
   </p:defaultTextStyle>
-  <p:extLst>
-    <p:ext uri="{EFAFB233-063F-42B5-8137-9DF3F51BA10A}">
-      <p15:sldGuideLst xmlns:p15="http://schemas.microsoft.com/office/powerpoint/2012/main">
-        <p15:guide id="1" orient="horz" pos="1393">
-          <p15:clr>
-            <a:srgbClr val="A4A3A4"/>
-          </p15:clr>
-        </p15:guide>
-        <p15:guide id="2" pos="2880">
-          <p15:clr>
-            <a:srgbClr val="A4A3A4"/>
-          </p15:clr>
-        </p15:guide>
-      </p15:sldGuideLst>
-    </p:ext>
-  </p:extLst>
 </p:presentation>
 </file>
 
@@ -255,7 +239,9 @@
             </a:extLst>
           </a:blip>
           <a:srcRect r="50000"/>
-          <a:stretch/>
+          <a:stretch>
+            <a:fillRect/>
+          </a:stretch>
         </p:blipFill>
         <p:spPr bwMode="auto">
           <a:xfrm>
@@ -278,11 +264,6 @@
         </p:spPr>
       </p:pic>
     </p:spTree>
-    <p:extLst>
-      <p:ext uri="{BB962C8B-B14F-4D97-AF65-F5344CB8AC3E}">
-        <p14:creationId xmlns:p14="http://schemas.microsoft.com/office/powerpoint/2010/main" val="875712077"/>
-      </p:ext>
-    </p:extLst>
   </p:cSld>
   <p:clrMapOvr>
     <a:masterClrMapping/>
@@ -352,7 +333,7 @@
                   </a:schemeClr>
                 </a:solidFill>
                 <a:latin typeface="+mn-lt"/>
-                <a:cs typeface="Arial" pitchFamily="34" charset="0"/>
+                <a:cs typeface="Arial" panose="02080604020202020204" pitchFamily="34" charset="0"/>
               </a:defRPr>
             </a:lvl1pPr>
             <a:lvl2pPr marL="457200" indent="0">
@@ -398,11 +379,6 @@
         </p:txBody>
       </p:sp>
     </p:spTree>
-    <p:extLst>
-      <p:ext uri="{BB962C8B-B14F-4D97-AF65-F5344CB8AC3E}">
-        <p14:creationId xmlns:p14="http://schemas.microsoft.com/office/powerpoint/2010/main" val="3395063590"/>
-      </p:ext>
-    </p:extLst>
   </p:cSld>
   <p:clrMapOvr>
     <a:masterClrMapping/>
@@ -459,7 +435,7 @@
                   </a:schemeClr>
                 </a:solidFill>
                 <a:latin typeface="+mj-lt"/>
-                <a:cs typeface="Arial" pitchFamily="34" charset="0"/>
+                <a:cs typeface="Arial" panose="02080604020202020204" pitchFamily="34" charset="0"/>
               </a:defRPr>
             </a:lvl1pPr>
           </a:lstStyle>
@@ -469,6 +445,7 @@
               <a:rPr lang="en-US" altLang="ko-KR" dirty="0"/>
               <a:t>IMAGES &amp; CONTENTS</a:t>
             </a:r>
+            <a:endParaRPr lang="en-US" altLang="ko-KR" dirty="0"/>
           </a:p>
         </p:txBody>
       </p:sp>
@@ -504,7 +481,7 @@
                   </a:schemeClr>
                 </a:solidFill>
                 <a:latin typeface="+mn-lt"/>
-                <a:cs typeface="Arial" pitchFamily="34" charset="0"/>
+                <a:cs typeface="Arial" panose="02080604020202020204" pitchFamily="34" charset="0"/>
               </a:defRPr>
             </a:lvl1pPr>
           </a:lstStyle>
@@ -514,6 +491,7 @@
               <a:rPr lang="en-US" altLang="ko-KR" dirty="0"/>
               <a:t>Insert the title of your subtitle Here</a:t>
             </a:r>
+            <a:endParaRPr lang="en-US" altLang="ko-KR" dirty="0"/>
           </a:p>
         </p:txBody>
       </p:sp>
@@ -554,7 +532,7 @@
                   </a:schemeClr>
                 </a:solidFill>
                 <a:latin typeface="+mn-lt"/>
-                <a:cs typeface="Arial" pitchFamily="34" charset="0"/>
+                <a:cs typeface="Arial" panose="02080604020202020204" pitchFamily="34" charset="0"/>
               </a:defRPr>
             </a:lvl1pPr>
             <a:lvl2pPr marL="457200" indent="0">
@@ -636,7 +614,7 @@
                   </a:schemeClr>
                 </a:solidFill>
                 <a:latin typeface="+mn-lt"/>
-                <a:cs typeface="Arial" pitchFamily="34" charset="0"/>
+                <a:cs typeface="Arial" panose="02080604020202020204" pitchFamily="34" charset="0"/>
               </a:defRPr>
             </a:lvl1pPr>
             <a:lvl2pPr marL="457200" indent="0">
@@ -682,11 +660,6 @@
         </p:txBody>
       </p:sp>
     </p:spTree>
-    <p:extLst>
-      <p:ext uri="{BB962C8B-B14F-4D97-AF65-F5344CB8AC3E}">
-        <p14:creationId xmlns:p14="http://schemas.microsoft.com/office/powerpoint/2010/main" val="2988877178"/>
-      </p:ext>
-    </p:extLst>
   </p:cSld>
   <p:clrMapOvr>
     <a:masterClrMapping/>
@@ -750,9 +723,6 @@
         </p:style>
         <p:txBody>
           <a:bodyPr rot="0" spcFirstLastPara="0" vertOverflow="overflow" horzOverflow="overflow" vert="horz" wrap="square" lIns="91440" tIns="45720" rIns="91440" bIns="45720" numCol="1" spcCol="0" rtlCol="0" fromWordArt="0" anchor="ctr" anchorCtr="0" forceAA="0" compatLnSpc="1">
-            <a:prstTxWarp prst="textNoShape">
-              <a:avLst/>
-            </a:prstTxWarp>
             <a:noAutofit/>
           </a:bodyPr>
           <a:lstStyle/>
@@ -799,7 +769,7 @@
                   </a:schemeClr>
                 </a:solidFill>
                 <a:latin typeface="+mn-lt"/>
-                <a:cs typeface="Arial" pitchFamily="34" charset="0"/>
+                <a:cs typeface="Arial" panose="02080604020202020204" pitchFamily="34" charset="0"/>
               </a:defRPr>
             </a:lvl1pPr>
             <a:lvl2pPr marL="457200" indent="0">
@@ -881,7 +851,7 @@
                   </a:schemeClr>
                 </a:solidFill>
                 <a:latin typeface="+mn-lt"/>
-                <a:cs typeface="Arial" pitchFamily="34" charset="0"/>
+                <a:cs typeface="Arial" panose="02080604020202020204" pitchFamily="34" charset="0"/>
               </a:defRPr>
             </a:lvl1pPr>
             <a:lvl2pPr marL="457200" indent="0">
@@ -963,7 +933,7 @@
                   </a:schemeClr>
                 </a:solidFill>
                 <a:latin typeface="+mn-lt"/>
-                <a:cs typeface="Arial" pitchFamily="34" charset="0"/>
+                <a:cs typeface="Arial" panose="02080604020202020204" pitchFamily="34" charset="0"/>
               </a:defRPr>
             </a:lvl1pPr>
             <a:lvl2pPr marL="457200" indent="0">
@@ -1009,11 +979,6 @@
         </p:txBody>
       </p:sp>
     </p:spTree>
-    <p:extLst>
-      <p:ext uri="{BB962C8B-B14F-4D97-AF65-F5344CB8AC3E}">
-        <p14:creationId xmlns:p14="http://schemas.microsoft.com/office/powerpoint/2010/main" val="1742137841"/>
-      </p:ext>
-    </p:extLst>
   </p:cSld>
   <p:clrMapOvr>
     <a:masterClrMapping/>
@@ -1083,7 +1048,7 @@
                   </a:schemeClr>
                 </a:solidFill>
                 <a:latin typeface="+mn-lt"/>
-                <a:cs typeface="Arial" pitchFamily="34" charset="0"/>
+                <a:cs typeface="Arial" panose="02080604020202020204" pitchFamily="34" charset="0"/>
               </a:defRPr>
             </a:lvl1pPr>
             <a:lvl2pPr marL="457200" indent="0">
@@ -1165,7 +1130,7 @@
                   </a:schemeClr>
                 </a:solidFill>
                 <a:latin typeface="+mn-lt"/>
-                <a:cs typeface="Arial" pitchFamily="34" charset="0"/>
+                <a:cs typeface="Arial" panose="02080604020202020204" pitchFamily="34" charset="0"/>
               </a:defRPr>
             </a:lvl1pPr>
             <a:lvl2pPr marL="457200" indent="0">
@@ -1247,7 +1212,7 @@
                   </a:schemeClr>
                 </a:solidFill>
                 <a:latin typeface="+mn-lt"/>
-                <a:cs typeface="Arial" pitchFamily="34" charset="0"/>
+                <a:cs typeface="Arial" panose="02080604020202020204" pitchFamily="34" charset="0"/>
               </a:defRPr>
             </a:lvl1pPr>
             <a:lvl2pPr marL="457200" indent="0">
@@ -1329,7 +1294,7 @@
                   </a:schemeClr>
                 </a:solidFill>
                 <a:latin typeface="+mn-lt"/>
-                <a:cs typeface="Arial" pitchFamily="34" charset="0"/>
+                <a:cs typeface="Arial" panose="02080604020202020204" pitchFamily="34" charset="0"/>
               </a:defRPr>
             </a:lvl1pPr>
             <a:lvl2pPr marL="457200" indent="0">
@@ -1375,11 +1340,6 @@
         </p:txBody>
       </p:sp>
     </p:spTree>
-    <p:extLst>
-      <p:ext uri="{BB962C8B-B14F-4D97-AF65-F5344CB8AC3E}">
-        <p14:creationId xmlns:p14="http://schemas.microsoft.com/office/powerpoint/2010/main" val="1209397712"/>
-      </p:ext>
-    </p:extLst>
   </p:cSld>
   <p:clrMapOvr>
     <a:masterClrMapping/>
@@ -1436,7 +1396,7 @@
                   </a:schemeClr>
                 </a:solidFill>
                 <a:latin typeface="+mj-lt"/>
-                <a:cs typeface="Arial" pitchFamily="34" charset="0"/>
+                <a:cs typeface="Arial" panose="02080604020202020204" pitchFamily="34" charset="0"/>
               </a:defRPr>
             </a:lvl1pPr>
           </a:lstStyle>
@@ -1446,6 +1406,7 @@
               <a:rPr lang="en-US" altLang="ko-KR" dirty="0"/>
               <a:t>IMAGES &amp; CONTENTS</a:t>
             </a:r>
+            <a:endParaRPr lang="en-US" altLang="ko-KR" dirty="0"/>
           </a:p>
         </p:txBody>
       </p:sp>
@@ -1481,7 +1442,7 @@
                   </a:schemeClr>
                 </a:solidFill>
                 <a:latin typeface="+mn-lt"/>
-                <a:cs typeface="Arial" pitchFamily="34" charset="0"/>
+                <a:cs typeface="Arial" panose="02080604020202020204" pitchFamily="34" charset="0"/>
               </a:defRPr>
             </a:lvl1pPr>
           </a:lstStyle>
@@ -1491,6 +1452,7 @@
               <a:rPr lang="en-US" altLang="ko-KR" dirty="0"/>
               <a:t>Insert the title of your subtitle Here</a:t>
             </a:r>
+            <a:endParaRPr lang="en-US" altLang="ko-KR" dirty="0"/>
           </a:p>
         </p:txBody>
       </p:sp>
@@ -1623,7 +1585,7 @@
                   </a:schemeClr>
                 </a:solidFill>
                 <a:latin typeface="+mn-lt"/>
-                <a:cs typeface="Arial" pitchFamily="34" charset="0"/>
+                <a:cs typeface="Arial" panose="02080604020202020204" pitchFamily="34" charset="0"/>
               </a:defRPr>
             </a:lvl1pPr>
             <a:lvl2pPr marL="457200" indent="0">
@@ -1705,7 +1667,7 @@
                   </a:schemeClr>
                 </a:solidFill>
                 <a:latin typeface="+mn-lt"/>
-                <a:cs typeface="Arial" pitchFamily="34" charset="0"/>
+                <a:cs typeface="Arial" panose="02080604020202020204" pitchFamily="34" charset="0"/>
               </a:defRPr>
             </a:lvl1pPr>
             <a:lvl2pPr marL="457200" indent="0">
@@ -1787,7 +1749,7 @@
                   </a:schemeClr>
                 </a:solidFill>
                 <a:latin typeface="+mn-lt"/>
-                <a:cs typeface="Arial" pitchFamily="34" charset="0"/>
+                <a:cs typeface="Arial" panose="02080604020202020204" pitchFamily="34" charset="0"/>
               </a:defRPr>
             </a:lvl1pPr>
             <a:lvl2pPr marL="457200" indent="0">
@@ -1869,7 +1831,7 @@
                   </a:schemeClr>
                 </a:solidFill>
                 <a:latin typeface="+mn-lt"/>
-                <a:cs typeface="Arial" pitchFamily="34" charset="0"/>
+                <a:cs typeface="Arial" panose="02080604020202020204" pitchFamily="34" charset="0"/>
               </a:defRPr>
             </a:lvl1pPr>
             <a:lvl2pPr marL="457200" indent="0">
@@ -1951,7 +1913,7 @@
                   </a:schemeClr>
                 </a:solidFill>
                 <a:latin typeface="+mn-lt"/>
-                <a:cs typeface="Arial" pitchFamily="34" charset="0"/>
+                <a:cs typeface="Arial" panose="02080604020202020204" pitchFamily="34" charset="0"/>
               </a:defRPr>
             </a:lvl1pPr>
             <a:lvl2pPr marL="457200" indent="0">
@@ -1997,11 +1959,6 @@
         </p:txBody>
       </p:sp>
     </p:spTree>
-    <p:extLst>
-      <p:ext uri="{BB962C8B-B14F-4D97-AF65-F5344CB8AC3E}">
-        <p14:creationId xmlns:p14="http://schemas.microsoft.com/office/powerpoint/2010/main" val="3652426109"/>
-      </p:ext>
-    </p:extLst>
   </p:cSld>
   <p:clrMapOvr>
     <a:masterClrMapping/>
@@ -2072,7 +2029,7 @@
                   </a:schemeClr>
                 </a:solidFill>
                 <a:latin typeface="+mj-lt"/>
-                <a:cs typeface="Arial" pitchFamily="34" charset="0"/>
+                <a:cs typeface="Arial" panose="02080604020202020204" pitchFamily="34" charset="0"/>
               </a:defRPr>
             </a:lvl1pPr>
           </a:lstStyle>
@@ -2081,15 +2038,11 @@
               <a:rPr lang="en-US" altLang="ko-KR" dirty="0"/>
               <a:t>Fully Editable Shapes</a:t>
             </a:r>
+            <a:endParaRPr lang="en-US" altLang="ko-KR" dirty="0"/>
           </a:p>
         </p:txBody>
       </p:sp>
     </p:spTree>
-    <p:extLst>
-      <p:ext uri="{BB962C8B-B14F-4D97-AF65-F5344CB8AC3E}">
-        <p14:creationId xmlns:p14="http://schemas.microsoft.com/office/powerpoint/2010/main" val="3106909289"/>
-      </p:ext>
-    </p:extLst>
   </p:cSld>
   <p:clrMapOvr>
     <a:masterClrMapping/>
@@ -2146,7 +2099,7 @@
                   </a:schemeClr>
                 </a:solidFill>
                 <a:latin typeface="+mj-lt"/>
-                <a:cs typeface="Arial" pitchFamily="34" charset="0"/>
+                <a:cs typeface="Arial" panose="02080604020202020204" pitchFamily="34" charset="0"/>
               </a:defRPr>
             </a:lvl1pPr>
           </a:lstStyle>
@@ -2156,6 +2109,7 @@
               <a:rPr lang="en-US" altLang="ko-KR" dirty="0"/>
               <a:t>ICON SETS LAYOUT</a:t>
             </a:r>
+            <a:endParaRPr lang="en-US" altLang="ko-KR" dirty="0"/>
           </a:p>
         </p:txBody>
       </p:sp>
@@ -2317,11 +2271,6 @@
         </p:txBody>
       </p:sp>
     </p:spTree>
-    <p:extLst>
-      <p:ext uri="{BB962C8B-B14F-4D97-AF65-F5344CB8AC3E}">
-        <p14:creationId xmlns:p14="http://schemas.microsoft.com/office/powerpoint/2010/main" val="738182204"/>
-      </p:ext>
-    </p:extLst>
   </p:cSld>
   <p:clrMapOvr>
     <a:masterClrMapping/>
@@ -2561,7 +2510,7 @@
                   <a:schemeClr val="bg1"/>
                 </a:solidFill>
                 <a:latin typeface="+mj-lt"/>
-                <a:cs typeface="Arial" pitchFamily="34" charset="0"/>
+                <a:cs typeface="Arial" panose="02080604020202020204" pitchFamily="34" charset="0"/>
               </a:defRPr>
             </a:lvl1pPr>
           </a:lstStyle>
@@ -2571,6 +2520,7 @@
               <a:rPr lang="en-US" altLang="ko-KR" dirty="0"/>
               <a:t>SECTION BREAK</a:t>
             </a:r>
+            <a:endParaRPr lang="en-US" altLang="ko-KR" dirty="0"/>
           </a:p>
         </p:txBody>
       </p:sp>
@@ -2603,7 +2553,7 @@
                   <a:schemeClr val="bg1"/>
                 </a:solidFill>
                 <a:latin typeface="+mn-lt"/>
-                <a:cs typeface="Arial" pitchFamily="34" charset="0"/>
+                <a:cs typeface="Arial" panose="02080604020202020204" pitchFamily="34" charset="0"/>
               </a:defRPr>
             </a:lvl1pPr>
           </a:lstStyle>
@@ -2613,6 +2563,7 @@
               <a:rPr lang="en-US" altLang="ko-KR" dirty="0"/>
               <a:t>Insert the title of your subtitle Here</a:t>
             </a:r>
+            <a:endParaRPr lang="en-US" altLang="ko-KR" dirty="0"/>
           </a:p>
         </p:txBody>
       </p:sp>
@@ -2658,11 +2609,6 @@
         </p:spPr>
       </p:pic>
     </p:spTree>
-    <p:extLst>
-      <p:ext uri="{BB962C8B-B14F-4D97-AF65-F5344CB8AC3E}">
-        <p14:creationId xmlns:p14="http://schemas.microsoft.com/office/powerpoint/2010/main" val="1738235425"/>
-      </p:ext>
-    </p:extLst>
   </p:cSld>
   <p:clrMapOvr>
     <a:masterClrMapping/>
@@ -2719,7 +2665,7 @@
                   </a:schemeClr>
                 </a:solidFill>
                 <a:latin typeface="+mj-lt"/>
-                <a:cs typeface="Arial" pitchFamily="34" charset="0"/>
+                <a:cs typeface="Arial" panose="02080604020202020204" pitchFamily="34" charset="0"/>
               </a:defRPr>
             </a:lvl1pPr>
           </a:lstStyle>
@@ -2729,6 +2675,7 @@
               <a:rPr lang="en-US" altLang="ko-KR" dirty="0"/>
               <a:t>BASIC LAYOUT</a:t>
             </a:r>
+            <a:endParaRPr lang="en-US" altLang="ko-KR" dirty="0"/>
           </a:p>
         </p:txBody>
       </p:sp>
@@ -2764,7 +2711,7 @@
                   </a:schemeClr>
                 </a:solidFill>
                 <a:latin typeface="+mn-lt"/>
-                <a:cs typeface="Arial" pitchFamily="34" charset="0"/>
+                <a:cs typeface="Arial" panose="02080604020202020204" pitchFamily="34" charset="0"/>
               </a:defRPr>
             </a:lvl1pPr>
           </a:lstStyle>
@@ -2774,15 +2721,11 @@
               <a:rPr lang="en-US" altLang="ko-KR" dirty="0"/>
               <a:t>Insert the title of your subtitle Here</a:t>
             </a:r>
+            <a:endParaRPr lang="en-US" altLang="ko-KR" dirty="0"/>
           </a:p>
         </p:txBody>
       </p:sp>
     </p:spTree>
-    <p:extLst>
-      <p:ext uri="{BB962C8B-B14F-4D97-AF65-F5344CB8AC3E}">
-        <p14:creationId xmlns:p14="http://schemas.microsoft.com/office/powerpoint/2010/main" val="2428862388"/>
-      </p:ext>
-    </p:extLst>
   </p:cSld>
   <p:clrMapOvr>
     <a:masterClrMapping/>
@@ -2895,11 +2838,6 @@
         </p:spPr>
       </p:pic>
     </p:spTree>
-    <p:extLst>
-      <p:ext uri="{BB962C8B-B14F-4D97-AF65-F5344CB8AC3E}">
-        <p14:creationId xmlns:p14="http://schemas.microsoft.com/office/powerpoint/2010/main" val="1345998830"/>
-      </p:ext>
-    </p:extLst>
   </p:cSld>
   <p:clrMapOvr>
     <a:masterClrMapping/>
@@ -2963,9 +2901,6 @@
         </p:style>
         <p:txBody>
           <a:bodyPr rot="0" spcFirstLastPara="0" vertOverflow="overflow" horzOverflow="overflow" vert="horz" wrap="square" lIns="91440" tIns="45720" rIns="91440" bIns="45720" numCol="1" spcCol="0" rtlCol="0" fromWordArt="0" anchor="ctr" anchorCtr="0" forceAA="0" compatLnSpc="1">
-            <a:prstTxWarp prst="textNoShape">
-              <a:avLst/>
-            </a:prstTxWarp>
             <a:noAutofit/>
           </a:bodyPr>
           <a:lstStyle/>
@@ -3007,7 +2942,7 @@
                   </a:schemeClr>
                 </a:solidFill>
                 <a:latin typeface="+mj-lt"/>
-                <a:cs typeface="Arial" pitchFamily="34" charset="0"/>
+                <a:cs typeface="Arial" panose="02080604020202020204" pitchFamily="34" charset="0"/>
               </a:defRPr>
             </a:lvl1pPr>
           </a:lstStyle>
@@ -3017,6 +2952,7 @@
               <a:rPr lang="en-US" altLang="ko-KR" dirty="0"/>
               <a:t>BASIC LAYOUT</a:t>
             </a:r>
+            <a:endParaRPr lang="en-US" altLang="ko-KR" dirty="0"/>
           </a:p>
         </p:txBody>
       </p:sp>
@@ -3052,7 +2988,7 @@
                   </a:schemeClr>
                 </a:solidFill>
                 <a:latin typeface="+mn-lt"/>
-                <a:cs typeface="Arial" pitchFamily="34" charset="0"/>
+                <a:cs typeface="Arial" panose="02080604020202020204" pitchFamily="34" charset="0"/>
               </a:defRPr>
             </a:lvl1pPr>
           </a:lstStyle>
@@ -3062,6 +2998,7 @@
               <a:rPr lang="en-US" altLang="ko-KR" dirty="0"/>
               <a:t>Insert the title of your subtitle Here</a:t>
             </a:r>
+            <a:endParaRPr lang="en-US" altLang="ko-KR" dirty="0"/>
           </a:p>
         </p:txBody>
       </p:sp>
@@ -3155,11 +3092,6 @@
         </p:spPr>
       </p:pic>
     </p:spTree>
-    <p:extLst>
-      <p:ext uri="{BB962C8B-B14F-4D97-AF65-F5344CB8AC3E}">
-        <p14:creationId xmlns:p14="http://schemas.microsoft.com/office/powerpoint/2010/main" val="1526867806"/>
-      </p:ext>
-    </p:extLst>
   </p:cSld>
   <p:clrMapOvr>
     <a:masterClrMapping/>
@@ -3216,7 +3148,7 @@
                   </a:schemeClr>
                 </a:solidFill>
                 <a:latin typeface="+mj-lt"/>
-                <a:cs typeface="Arial" pitchFamily="34" charset="0"/>
+                <a:cs typeface="Arial" panose="02080604020202020204" pitchFamily="34" charset="0"/>
               </a:defRPr>
             </a:lvl1pPr>
           </a:lstStyle>
@@ -3226,6 +3158,7 @@
               <a:rPr lang="en-US" altLang="ko-KR" dirty="0"/>
               <a:t>BASIC LAYOUT</a:t>
             </a:r>
+            <a:endParaRPr lang="en-US" altLang="ko-KR" dirty="0"/>
           </a:p>
         </p:txBody>
       </p:sp>
@@ -3261,7 +3194,7 @@
                   </a:schemeClr>
                 </a:solidFill>
                 <a:latin typeface="+mn-lt"/>
-                <a:cs typeface="Arial" pitchFamily="34" charset="0"/>
+                <a:cs typeface="Arial" panose="02080604020202020204" pitchFamily="34" charset="0"/>
               </a:defRPr>
             </a:lvl1pPr>
           </a:lstStyle>
@@ -3271,6 +3204,7 @@
               <a:rPr lang="en-US" altLang="ko-KR" dirty="0"/>
               <a:t>Insert the title of your subtitle Here</a:t>
             </a:r>
+            <a:endParaRPr lang="en-US" altLang="ko-KR" dirty="0"/>
           </a:p>
         </p:txBody>
       </p:sp>
@@ -3367,11 +3301,6 @@
         </p:txBody>
       </p:sp>
     </p:spTree>
-    <p:extLst>
-      <p:ext uri="{BB962C8B-B14F-4D97-AF65-F5344CB8AC3E}">
-        <p14:creationId xmlns:p14="http://schemas.microsoft.com/office/powerpoint/2010/main" val="312904482"/>
-      </p:ext>
-    </p:extLst>
   </p:cSld>
   <p:clrMapOvr>
     <a:masterClrMapping/>
@@ -3428,7 +3357,7 @@
                   </a:schemeClr>
                 </a:solidFill>
                 <a:latin typeface="+mj-lt"/>
-                <a:cs typeface="Arial" pitchFamily="34" charset="0"/>
+                <a:cs typeface="Arial" panose="02080604020202020204" pitchFamily="34" charset="0"/>
               </a:defRPr>
             </a:lvl1pPr>
           </a:lstStyle>
@@ -3438,6 +3367,7 @@
               <a:rPr lang="en-US" altLang="ko-KR" dirty="0"/>
               <a:t>BASIC LAYOUT</a:t>
             </a:r>
+            <a:endParaRPr lang="en-US" altLang="ko-KR" dirty="0"/>
           </a:p>
         </p:txBody>
       </p:sp>
@@ -3473,7 +3403,7 @@
                   </a:schemeClr>
                 </a:solidFill>
                 <a:latin typeface="+mn-lt"/>
-                <a:cs typeface="Arial" pitchFamily="34" charset="0"/>
+                <a:cs typeface="Arial" panose="02080604020202020204" pitchFamily="34" charset="0"/>
               </a:defRPr>
             </a:lvl1pPr>
           </a:lstStyle>
@@ -3483,15 +3413,11 @@
               <a:rPr lang="en-US" altLang="ko-KR" dirty="0"/>
               <a:t>Insert the title of your subtitle Here</a:t>
             </a:r>
+            <a:endParaRPr lang="en-US" altLang="ko-KR" dirty="0"/>
           </a:p>
         </p:txBody>
       </p:sp>
     </p:spTree>
-    <p:extLst>
-      <p:ext uri="{BB962C8B-B14F-4D97-AF65-F5344CB8AC3E}">
-        <p14:creationId xmlns:p14="http://schemas.microsoft.com/office/powerpoint/2010/main" val="1960850198"/>
-      </p:ext>
-    </p:extLst>
   </p:cSld>
   <p:clrMapOvr>
     <a:masterClrMapping/>
@@ -3599,7 +3525,7 @@
                   <a:schemeClr val="bg1"/>
                 </a:solidFill>
                 <a:latin typeface="+mj-lt"/>
-                <a:cs typeface="Arial" pitchFamily="34" charset="0"/>
+                <a:cs typeface="Arial" panose="02080604020202020204" pitchFamily="34" charset="0"/>
               </a:defRPr>
             </a:lvl1pPr>
           </a:lstStyle>
@@ -3609,6 +3535,7 @@
               <a:rPr lang="en-US" altLang="ko-KR" dirty="0"/>
               <a:t>IMAGES &amp; CONTENTS</a:t>
             </a:r>
+            <a:endParaRPr lang="en-US" altLang="ko-KR" dirty="0"/>
           </a:p>
         </p:txBody>
       </p:sp>
@@ -3641,7 +3568,7 @@
                   <a:schemeClr val="bg1"/>
                 </a:solidFill>
                 <a:latin typeface="+mn-lt"/>
-                <a:cs typeface="Arial" pitchFamily="34" charset="0"/>
+                <a:cs typeface="Arial" panose="02080604020202020204" pitchFamily="34" charset="0"/>
               </a:defRPr>
             </a:lvl1pPr>
           </a:lstStyle>
@@ -3651,6 +3578,7 @@
               <a:rPr lang="en-US" altLang="ko-KR" dirty="0"/>
               <a:t>Insert the title of your subtitle Here</a:t>
             </a:r>
+            <a:endParaRPr lang="en-US" altLang="ko-KR" dirty="0"/>
           </a:p>
         </p:txBody>
       </p:sp>
@@ -3691,7 +3619,7 @@
                   </a:schemeClr>
                 </a:solidFill>
                 <a:latin typeface="+mn-lt"/>
-                <a:cs typeface="Arial" pitchFamily="34" charset="0"/>
+                <a:cs typeface="Arial" panose="02080604020202020204" pitchFamily="34" charset="0"/>
               </a:defRPr>
             </a:lvl1pPr>
             <a:lvl2pPr marL="457200" indent="0">
@@ -3773,7 +3701,7 @@
                   </a:schemeClr>
                 </a:solidFill>
                 <a:latin typeface="+mn-lt"/>
-                <a:cs typeface="Arial" pitchFamily="34" charset="0"/>
+                <a:cs typeface="Arial" panose="02080604020202020204" pitchFamily="34" charset="0"/>
               </a:defRPr>
             </a:lvl1pPr>
             <a:lvl2pPr marL="457200" indent="0">
@@ -3855,7 +3783,7 @@
                   </a:schemeClr>
                 </a:solidFill>
                 <a:latin typeface="+mn-lt"/>
-                <a:cs typeface="Arial" pitchFamily="34" charset="0"/>
+                <a:cs typeface="Arial" panose="02080604020202020204" pitchFamily="34" charset="0"/>
               </a:defRPr>
             </a:lvl1pPr>
             <a:lvl2pPr marL="457200" indent="0">
@@ -3937,7 +3865,7 @@
                   </a:schemeClr>
                 </a:solidFill>
                 <a:latin typeface="+mn-lt"/>
-                <a:cs typeface="Arial" pitchFamily="34" charset="0"/>
+                <a:cs typeface="Arial" panose="02080604020202020204" pitchFamily="34" charset="0"/>
               </a:defRPr>
             </a:lvl1pPr>
             <a:lvl2pPr marL="457200" indent="0">
@@ -4167,11 +4095,6 @@
         </p:txBody>
       </p:sp>
     </p:spTree>
-    <p:extLst>
-      <p:ext uri="{BB962C8B-B14F-4D97-AF65-F5344CB8AC3E}">
-        <p14:creationId xmlns:p14="http://schemas.microsoft.com/office/powerpoint/2010/main" val="1615967038"/>
-      </p:ext>
-    </p:extLst>
   </p:cSld>
   <p:clrMapOvr>
     <a:masterClrMapping/>
@@ -4235,9 +4158,6 @@
         </p:style>
         <p:txBody>
           <a:bodyPr rot="0" spcFirstLastPara="0" vertOverflow="overflow" horzOverflow="overflow" vert="horz" wrap="square" lIns="91440" tIns="45720" rIns="91440" bIns="45720" numCol="1" spcCol="0" rtlCol="0" fromWordArt="0" anchor="ctr" anchorCtr="0" forceAA="0" compatLnSpc="1">
-            <a:prstTxWarp prst="textNoShape">
-              <a:avLst/>
-            </a:prstTxWarp>
             <a:noAutofit/>
           </a:bodyPr>
           <a:lstStyle/>
@@ -4279,7 +4199,7 @@
                   </a:schemeClr>
                 </a:solidFill>
                 <a:latin typeface="+mj-lt"/>
-                <a:cs typeface="Arial" pitchFamily="34" charset="0"/>
+                <a:cs typeface="Arial" panose="02080604020202020204" pitchFamily="34" charset="0"/>
               </a:defRPr>
             </a:lvl1pPr>
           </a:lstStyle>
@@ -4289,6 +4209,7 @@
               <a:rPr lang="en-US" altLang="ko-KR" dirty="0"/>
               <a:t>IMAGES &amp; CONTENTS</a:t>
             </a:r>
+            <a:endParaRPr lang="en-US" altLang="ko-KR" dirty="0"/>
           </a:p>
         </p:txBody>
       </p:sp>
@@ -4324,7 +4245,7 @@
                   </a:schemeClr>
                 </a:solidFill>
                 <a:latin typeface="+mn-lt"/>
-                <a:cs typeface="Arial" pitchFamily="34" charset="0"/>
+                <a:cs typeface="Arial" panose="02080604020202020204" pitchFamily="34" charset="0"/>
               </a:defRPr>
             </a:lvl1pPr>
           </a:lstStyle>
@@ -4334,6 +4255,7 @@
               <a:rPr lang="en-US" altLang="ko-KR" dirty="0"/>
               <a:t>Insert the title of your subtitle Here</a:t>
             </a:r>
+            <a:endParaRPr lang="en-US" altLang="ko-KR" dirty="0"/>
           </a:p>
         </p:txBody>
       </p:sp>
@@ -4415,7 +4337,7 @@
                   </a:schemeClr>
                 </a:solidFill>
                 <a:latin typeface="+mn-lt"/>
-                <a:cs typeface="Arial" pitchFamily="34" charset="0"/>
+                <a:cs typeface="Arial" panose="02080604020202020204" pitchFamily="34" charset="0"/>
               </a:defRPr>
             </a:lvl1pPr>
             <a:lvl2pPr marL="457200" indent="0">
@@ -4507,11 +4429,6 @@
         </p:txBody>
       </p:sp>
     </p:spTree>
-    <p:extLst>
-      <p:ext uri="{BB962C8B-B14F-4D97-AF65-F5344CB8AC3E}">
-        <p14:creationId xmlns:p14="http://schemas.microsoft.com/office/powerpoint/2010/main" val="1326058886"/>
-      </p:ext>
-    </p:extLst>
   </p:cSld>
   <p:clrMapOvr>
     <a:masterClrMapping/>
@@ -4562,7 +4479,7 @@
               <a:buNone/>
               <a:defRPr sz="3600" b="0" baseline="0">
                 <a:latin typeface="+mj-lt"/>
-                <a:cs typeface="Arial" pitchFamily="34" charset="0"/>
+                <a:cs typeface="Arial" panose="02080604020202020204" pitchFamily="34" charset="0"/>
               </a:defRPr>
             </a:lvl1pPr>
           </a:lstStyle>
@@ -4572,6 +4489,7 @@
               <a:rPr lang="en-US" altLang="ko-KR" dirty="0"/>
               <a:t>IMAGES &amp; CONTENTS</a:t>
             </a:r>
+            <a:endParaRPr lang="en-US" altLang="ko-KR" dirty="0"/>
           </a:p>
         </p:txBody>
       </p:sp>
@@ -4607,7 +4525,7 @@
                   </a:schemeClr>
                 </a:solidFill>
                 <a:latin typeface="+mn-lt"/>
-                <a:cs typeface="Arial" pitchFamily="34" charset="0"/>
+                <a:cs typeface="Arial" panose="02080604020202020204" pitchFamily="34" charset="0"/>
               </a:defRPr>
             </a:lvl1pPr>
           </a:lstStyle>
@@ -4617,6 +4535,7 @@
               <a:rPr lang="en-US" altLang="ko-KR" dirty="0"/>
               <a:t>Insert the title of your subtitle Here</a:t>
             </a:r>
+            <a:endParaRPr lang="en-US" altLang="ko-KR" dirty="0"/>
           </a:p>
         </p:txBody>
       </p:sp>
@@ -4659,9 +4578,6 @@
         </p:style>
         <p:txBody>
           <a:bodyPr rot="0" spcFirstLastPara="0" vertOverflow="overflow" horzOverflow="overflow" vert="horz" wrap="square" lIns="91440" tIns="45720" rIns="91440" bIns="45720" numCol="1" spcCol="0" rtlCol="0" fromWordArt="0" anchor="ctr" anchorCtr="0" forceAA="0" compatLnSpc="1">
-            <a:prstTxWarp prst="textNoShape">
-              <a:avLst/>
-            </a:prstTxWarp>
             <a:noAutofit/>
           </a:bodyPr>
           <a:lstStyle/>
@@ -4749,7 +4665,7 @@
                   </a:schemeClr>
                 </a:solidFill>
                 <a:latin typeface="+mn-lt"/>
-                <a:cs typeface="Arial" pitchFamily="34" charset="0"/>
+                <a:cs typeface="Arial" panose="02080604020202020204" pitchFamily="34" charset="0"/>
               </a:defRPr>
             </a:lvl1pPr>
             <a:lvl2pPr marL="457200" indent="0">
@@ -4831,7 +4747,7 @@
                   </a:schemeClr>
                 </a:solidFill>
                 <a:latin typeface="+mn-lt"/>
-                <a:cs typeface="Arial" pitchFamily="34" charset="0"/>
+                <a:cs typeface="Arial" panose="02080604020202020204" pitchFamily="34" charset="0"/>
               </a:defRPr>
             </a:lvl1pPr>
             <a:lvl2pPr marL="457200" indent="0">
@@ -4877,11 +4793,6 @@
         </p:txBody>
       </p:sp>
     </p:spTree>
-    <p:extLst>
-      <p:ext uri="{BB962C8B-B14F-4D97-AF65-F5344CB8AC3E}">
-        <p14:creationId xmlns:p14="http://schemas.microsoft.com/office/powerpoint/2010/main" val="700137395"/>
-      </p:ext>
-    </p:extLst>
   </p:cSld>
   <p:clrMapOvr>
     <a:masterClrMapping/>
@@ -4943,7 +4854,7 @@
                   </a:schemeClr>
                 </a:solidFill>
                 <a:latin typeface="+mn-lt"/>
-                <a:cs typeface="Arial" pitchFamily="34" charset="0"/>
+                <a:cs typeface="Arial" panose="02080604020202020204" pitchFamily="34" charset="0"/>
               </a:defRPr>
             </a:lvl1pPr>
             <a:lvl2pPr marL="457200" indent="0">
@@ -5081,11 +4992,6 @@
         </p:txBody>
       </p:sp>
     </p:spTree>
-    <p:extLst>
-      <p:ext uri="{BB962C8B-B14F-4D97-AF65-F5344CB8AC3E}">
-        <p14:creationId xmlns:p14="http://schemas.microsoft.com/office/powerpoint/2010/main" val="293440264"/>
-      </p:ext>
-    </p:extLst>
   </p:cSld>
   <p:clrMapOvr>
     <a:masterClrMapping/>
@@ -5116,30 +5022,25 @@
         </a:xfrm>
       </p:grpSpPr>
     </p:spTree>
-    <p:extLst>
-      <p:ext uri="{BB962C8B-B14F-4D97-AF65-F5344CB8AC3E}">
-        <p14:creationId xmlns:p14="http://schemas.microsoft.com/office/powerpoint/2010/main" val="1737555548"/>
-      </p:ext>
-    </p:extLst>
   </p:cSld>
   <p:clrMap bg1="lt1" tx1="dk1" bg2="lt2" tx2="dk2" accent1="accent1" accent2="accent2" accent3="accent3" accent4="accent4" accent5="accent5" accent6="accent6" hlink="hlink" folHlink="folHlink"/>
   <p:sldLayoutIdLst>
-    <p:sldLayoutId id="2147483659" r:id="rId1"/>
-    <p:sldLayoutId id="2147483672" r:id="rId2"/>
-    <p:sldLayoutId id="2147483670" r:id="rId3"/>
+    <p:sldLayoutId id="2147483649" r:id="rId1"/>
+    <p:sldLayoutId id="2147483650" r:id="rId2"/>
+    <p:sldLayoutId id="2147483651" r:id="rId3"/>
     <p:sldLayoutId id="2147483652" r:id="rId4"/>
-    <p:sldLayoutId id="2147483671" r:id="rId5"/>
-    <p:sldLayoutId id="2147483655" r:id="rId6"/>
-    <p:sldLayoutId id="2147483662" r:id="rId7"/>
-    <p:sldLayoutId id="2147483663" r:id="rId8"/>
-    <p:sldLayoutId id="2147483665" r:id="rId9"/>
-    <p:sldLayoutId id="2147483666" r:id="rId10"/>
-    <p:sldLayoutId id="2147483667" r:id="rId11"/>
-    <p:sldLayoutId id="2147483664" r:id="rId12"/>
-    <p:sldLayoutId id="2147483668" r:id="rId13"/>
-    <p:sldLayoutId id="2147483669" r:id="rId14"/>
-    <p:sldLayoutId id="2147483673" r:id="rId15"/>
-    <p:sldLayoutId id="2147483656" r:id="rId16"/>
+    <p:sldLayoutId id="2147483653" r:id="rId5"/>
+    <p:sldLayoutId id="2147483654" r:id="rId6"/>
+    <p:sldLayoutId id="2147483655" r:id="rId7"/>
+    <p:sldLayoutId id="2147483656" r:id="rId8"/>
+    <p:sldLayoutId id="2147483657" r:id="rId9"/>
+    <p:sldLayoutId id="2147483658" r:id="rId10"/>
+    <p:sldLayoutId id="2147483659" r:id="rId11"/>
+    <p:sldLayoutId id="2147483660" r:id="rId12"/>
+    <p:sldLayoutId id="2147483661" r:id="rId13"/>
+    <p:sldLayoutId id="2147483662" r:id="rId14"/>
+    <p:sldLayoutId id="2147483663" r:id="rId15"/>
+    <p:sldLayoutId id="2147483664" r:id="rId16"/>
   </p:sldLayoutIdLst>
   <p:txStyles>
     <p:titleStyle>
@@ -5163,7 +5064,7 @@
         <a:spcBef>
           <a:spcPct val="20000"/>
         </a:spcBef>
-        <a:buFont typeface="Arial" pitchFamily="34" charset="0"/>
+        <a:buFont typeface="Arial" panose="02080604020202020204" pitchFamily="34" charset="0"/>
         <a:buChar char="•"/>
         <a:defRPr sz="3200" kern="1200">
           <a:solidFill>
@@ -5178,7 +5079,7 @@
         <a:spcBef>
           <a:spcPct val="20000"/>
         </a:spcBef>
-        <a:buFont typeface="Arial" pitchFamily="34" charset="0"/>
+        <a:buFont typeface="Arial" panose="02080604020202020204" pitchFamily="34" charset="0"/>
         <a:buChar char="–"/>
         <a:defRPr sz="2800" kern="1200">
           <a:solidFill>
@@ -5193,7 +5094,7 @@
         <a:spcBef>
           <a:spcPct val="20000"/>
         </a:spcBef>
-        <a:buFont typeface="Arial" pitchFamily="34" charset="0"/>
+        <a:buFont typeface="Arial" panose="02080604020202020204" pitchFamily="34" charset="0"/>
         <a:buChar char="•"/>
         <a:defRPr sz="2400" kern="1200">
           <a:solidFill>
@@ -5208,7 +5109,7 @@
         <a:spcBef>
           <a:spcPct val="20000"/>
         </a:spcBef>
-        <a:buFont typeface="Arial" pitchFamily="34" charset="0"/>
+        <a:buFont typeface="Arial" panose="02080604020202020204" pitchFamily="34" charset="0"/>
         <a:buChar char="–"/>
         <a:defRPr sz="2000" kern="1200">
           <a:solidFill>
@@ -5223,7 +5124,7 @@
         <a:spcBef>
           <a:spcPct val="20000"/>
         </a:spcBef>
-        <a:buFont typeface="Arial" pitchFamily="34" charset="0"/>
+        <a:buFont typeface="Arial" panose="02080604020202020204" pitchFamily="34" charset="0"/>
         <a:buChar char="»"/>
         <a:defRPr sz="2000" kern="1200">
           <a:solidFill>
@@ -5238,7 +5139,7 @@
         <a:spcBef>
           <a:spcPct val="20000"/>
         </a:spcBef>
-        <a:buFont typeface="Arial" pitchFamily="34" charset="0"/>
+        <a:buFont typeface="Arial" panose="02080604020202020204" pitchFamily="34" charset="0"/>
         <a:buChar char="•"/>
         <a:defRPr sz="2000" kern="1200">
           <a:solidFill>
@@ -5253,7 +5154,7 @@
         <a:spcBef>
           <a:spcPct val="20000"/>
         </a:spcBef>
-        <a:buFont typeface="Arial" pitchFamily="34" charset="0"/>
+        <a:buFont typeface="Arial" panose="02080604020202020204" pitchFamily="34" charset="0"/>
         <a:buChar char="•"/>
         <a:defRPr sz="2000" kern="1200">
           <a:solidFill>
@@ -5268,7 +5169,7 @@
         <a:spcBef>
           <a:spcPct val="20000"/>
         </a:spcBef>
-        <a:buFont typeface="Arial" pitchFamily="34" charset="0"/>
+        <a:buFont typeface="Arial" panose="02080604020202020204" pitchFamily="34" charset="0"/>
         <a:buChar char="•"/>
         <a:defRPr sz="2000" kern="1200">
           <a:solidFill>
@@ -5283,7 +5184,7 @@
         <a:spcBef>
           <a:spcPct val="20000"/>
         </a:spcBef>
-        <a:buFont typeface="Arial" pitchFamily="34" charset="0"/>
+        <a:buFont typeface="Arial" panose="02080604020202020204" pitchFamily="34" charset="0"/>
         <a:buChar char="•"/>
         <a:defRPr sz="2000" kern="1200">
           <a:solidFill>
@@ -5417,16 +5318,11 @@
         </a:xfrm>
       </p:grpSpPr>
     </p:spTree>
-    <p:extLst>
-      <p:ext uri="{BB962C8B-B14F-4D97-AF65-F5344CB8AC3E}">
-        <p14:creationId xmlns:p14="http://schemas.microsoft.com/office/powerpoint/2010/main" val="2754710703"/>
-      </p:ext>
-    </p:extLst>
   </p:cSld>
   <p:clrMap bg1="lt1" tx1="dk1" bg2="lt2" tx2="dk2" accent1="accent1" accent2="accent2" accent3="accent3" accent4="accent4" accent5="accent5" accent6="accent6" hlink="hlink" folHlink="folHlink"/>
   <p:sldLayoutIdLst>
-    <p:sldLayoutId id="2147483654" r:id="rId1"/>
-    <p:sldLayoutId id="2147483674" r:id="rId2"/>
+    <p:sldLayoutId id="2147483666" r:id="rId1"/>
+    <p:sldLayoutId id="2147483667" r:id="rId2"/>
   </p:sldLayoutIdLst>
   <p:txStyles>
     <p:titleStyle>
@@ -5450,7 +5346,7 @@
         <a:spcBef>
           <a:spcPct val="20000"/>
         </a:spcBef>
-        <a:buFont typeface="Arial" pitchFamily="34" charset="0"/>
+        <a:buFont typeface="Arial" panose="02080604020202020204" pitchFamily="34" charset="0"/>
         <a:buChar char="•"/>
         <a:defRPr sz="3200" kern="1200">
           <a:solidFill>
@@ -5465,7 +5361,7 @@
         <a:spcBef>
           <a:spcPct val="20000"/>
         </a:spcBef>
-        <a:buFont typeface="Arial" pitchFamily="34" charset="0"/>
+        <a:buFont typeface="Arial" panose="02080604020202020204" pitchFamily="34" charset="0"/>
         <a:buChar char="–"/>
         <a:defRPr sz="2800" kern="1200">
           <a:solidFill>
@@ -5480,7 +5376,7 @@
         <a:spcBef>
           <a:spcPct val="20000"/>
         </a:spcBef>
-        <a:buFont typeface="Arial" pitchFamily="34" charset="0"/>
+        <a:buFont typeface="Arial" panose="02080604020202020204" pitchFamily="34" charset="0"/>
         <a:buChar char="•"/>
         <a:defRPr sz="2400" kern="1200">
           <a:solidFill>
@@ -5495,7 +5391,7 @@
         <a:spcBef>
           <a:spcPct val="20000"/>
         </a:spcBef>
-        <a:buFont typeface="Arial" pitchFamily="34" charset="0"/>
+        <a:buFont typeface="Arial" panose="02080604020202020204" pitchFamily="34" charset="0"/>
         <a:buChar char="–"/>
         <a:defRPr sz="2000" kern="1200">
           <a:solidFill>
@@ -5510,7 +5406,7 @@
         <a:spcBef>
           <a:spcPct val="20000"/>
         </a:spcBef>
-        <a:buFont typeface="Arial" pitchFamily="34" charset="0"/>
+        <a:buFont typeface="Arial" panose="02080604020202020204" pitchFamily="34" charset="0"/>
         <a:buChar char="»"/>
         <a:defRPr sz="2000" kern="1200">
           <a:solidFill>
@@ -5525,7 +5421,7 @@
         <a:spcBef>
           <a:spcPct val="20000"/>
         </a:spcBef>
-        <a:buFont typeface="Arial" pitchFamily="34" charset="0"/>
+        <a:buFont typeface="Arial" panose="02080604020202020204" pitchFamily="34" charset="0"/>
         <a:buChar char="•"/>
         <a:defRPr sz="2000" kern="1200">
           <a:solidFill>
@@ -5540,7 +5436,7 @@
         <a:spcBef>
           <a:spcPct val="20000"/>
         </a:spcBef>
-        <a:buFont typeface="Arial" pitchFamily="34" charset="0"/>
+        <a:buFont typeface="Arial" panose="02080604020202020204" pitchFamily="34" charset="0"/>
         <a:buChar char="•"/>
         <a:defRPr sz="2000" kern="1200">
           <a:solidFill>
@@ -5555,7 +5451,7 @@
         <a:spcBef>
           <a:spcPct val="20000"/>
         </a:spcBef>
-        <a:buFont typeface="Arial" pitchFamily="34" charset="0"/>
+        <a:buFont typeface="Arial" panose="02080604020202020204" pitchFamily="34" charset="0"/>
         <a:buChar char="•"/>
         <a:defRPr sz="2000" kern="1200">
           <a:solidFill>
@@ -5570,7 +5466,7 @@
         <a:spcBef>
           <a:spcPct val="20000"/>
         </a:spcBef>
-        <a:buFont typeface="Arial" pitchFamily="34" charset="0"/>
+        <a:buFont typeface="Arial" panose="02080604020202020204" pitchFamily="34" charset="0"/>
         <a:buChar char="•"/>
         <a:defRPr sz="2000" kern="1200">
           <a:solidFill>
@@ -5750,6 +5646,19 @@
               </a:rPr>
               <a:t> :</a:t>
             </a:r>
+            <a:endParaRPr lang="en-US" altLang="ko-KR" sz="2400" dirty="0">
+              <a:solidFill>
+                <a:schemeClr val="tx1"/>
+              </a:solidFill>
+              <a:effectLst>
+                <a:outerShdw blurRad="38100" dist="38100" dir="2700000" algn="tl">
+                  <a:srgbClr val="000000">
+                    <a:alpha val="43137"/>
+                  </a:srgbClr>
+                </a:outerShdw>
+              </a:effectLst>
+              <a:latin typeface="Arial Black" panose="020B0A04020102020204" pitchFamily="34" charset="0"/>
+            </a:endParaRPr>
           </a:p>
           <a:p>
             <a:r>
@@ -5850,13 +5759,7 @@
       </p:sp>
       <p:grpSp>
         <p:nvGrpSpPr>
-          <p:cNvPr id="5" name="Group 4">
-            <a:extLst>
-              <a:ext uri="{FF2B5EF4-FFF2-40B4-BE49-F238E27FC236}">
-                <a16:creationId xmlns:a16="http://schemas.microsoft.com/office/drawing/2014/main" id="{C68AE119-B563-48DA-AACF-3EC7400319AF}"/>
-              </a:ext>
-            </a:extLst>
-          </p:cNvPr>
+          <p:cNvPr id="5" name="Group 4"/>
           <p:cNvGrpSpPr/>
           <p:nvPr/>
         </p:nvGrpSpPr>
@@ -5870,13 +5773,7 @@
         </p:grpSpPr>
         <p:sp>
           <p:nvSpPr>
-            <p:cNvPr id="6" name="Rectangle 5">
-              <a:extLst>
-                <a:ext uri="{FF2B5EF4-FFF2-40B4-BE49-F238E27FC236}">
-                  <a16:creationId xmlns:a16="http://schemas.microsoft.com/office/drawing/2014/main" id="{07DA9CBE-3D19-464E-9A14-856C0D113A0A}"/>
-                </a:ext>
-              </a:extLst>
-            </p:cNvPr>
+            <p:cNvPr id="6" name="Rectangle 5"/>
             <p:cNvSpPr/>
             <p:nvPr/>
           </p:nvSpPr>
@@ -5924,16 +5821,8 @@
         </p:sp>
         <p:sp>
           <p:nvSpPr>
-            <p:cNvPr id="7" name="Text Placeholder 9">
-              <a:extLst>
-                <a:ext uri="{FF2B5EF4-FFF2-40B4-BE49-F238E27FC236}">
-                  <a16:creationId xmlns:a16="http://schemas.microsoft.com/office/drawing/2014/main" id="{DE61F74A-4BFC-4D27-B89D-52C2FE3F5A45}"/>
-                </a:ext>
-              </a:extLst>
-            </p:cNvPr>
-            <p:cNvSpPr txBox="1">
-              <a:spLocks/>
-            </p:cNvSpPr>
+            <p:cNvPr id="7" name="Text Placeholder 9"/>
+            <p:cNvSpPr txBox="1"/>
             <p:nvPr/>
           </p:nvSpPr>
           <p:spPr>
@@ -6197,26 +6086,36 @@
                 </a:rPr>
                 <a:t>Jurusan Teknologi Informasi</a:t>
               </a:r>
+              <a:endParaRPr lang="id-ID" sz="1200" dirty="0">
+                <a:solidFill>
+                  <a:schemeClr val="accent6">
+                    <a:lumMod val="20000"/>
+                    <a:lumOff val="80000"/>
+                  </a:schemeClr>
+                </a:solidFill>
+                <a:effectLst>
+                  <a:outerShdw blurRad="38100" dist="38100" dir="2700000" algn="tl">
+                    <a:srgbClr val="000000">
+                      <a:alpha val="43137"/>
+                    </a:srgbClr>
+                  </a:outerShdw>
+                </a:effectLst>
+                <a:latin typeface="Arial Black" panose="020B0A04020102020204" pitchFamily="34" charset="0"/>
+              </a:endParaRPr>
             </a:p>
           </p:txBody>
         </p:sp>
       </p:grpSp>
       <p:pic>
         <p:nvPicPr>
-          <p:cNvPr id="8" name="Picture 7">
-            <a:extLst>
-              <a:ext uri="{FF2B5EF4-FFF2-40B4-BE49-F238E27FC236}">
-                <a16:creationId xmlns:a16="http://schemas.microsoft.com/office/drawing/2014/main" id="{E8AA3FFC-2CB2-471A-AE94-8C16F0230514}"/>
-              </a:ext>
-            </a:extLst>
-          </p:cNvPr>
+          <p:cNvPr id="8" name="Picture 7"/>
           <p:cNvPicPr>
             <a:picLocks noChangeAspect="1"/>
           </p:cNvPicPr>
           <p:nvPr/>
         </p:nvPicPr>
         <p:blipFill>
-          <a:blip r:embed="rId2" cstate="print">
+          <a:blip r:embed="rId1" cstate="print">
             <a:extLst>
               <a:ext uri="{28A0092B-C50C-407E-A947-70E740481C1C}">
                 <a14:useLocalDpi xmlns:a14="http://schemas.microsoft.com/office/drawing/2010/main" val="0"/>
@@ -6262,11 +6161,6 @@
         </p:spPr>
       </p:pic>
     </p:spTree>
-    <p:extLst>
-      <p:ext uri="{BB962C8B-B14F-4D97-AF65-F5344CB8AC3E}">
-        <p14:creationId xmlns:p14="http://schemas.microsoft.com/office/powerpoint/2010/main" val="3101234267"/>
-      </p:ext>
-    </p:extLst>
   </p:cSld>
   <p:clrMapOvr>
     <a:masterClrMapping/>
@@ -6504,13 +6398,7 @@
       </p:grpSpPr>
       <p:sp>
         <p:nvSpPr>
-          <p:cNvPr id="3" name="TextBox 2">
-            <a:extLst>
-              <a:ext uri="{FF2B5EF4-FFF2-40B4-BE49-F238E27FC236}">
-                <a16:creationId xmlns:a16="http://schemas.microsoft.com/office/drawing/2014/main" id="{A25F1DFE-5A1C-F636-333C-61007144FEF9}"/>
-              </a:ext>
-            </a:extLst>
-          </p:cNvPr>
+          <p:cNvPr id="3" name="TextBox 2"/>
           <p:cNvSpPr txBox="1"/>
           <p:nvPr/>
         </p:nvSpPr>
@@ -6532,20 +6420,21 @@
           <a:p>
             <a:r>
               <a:rPr lang="id-ID" dirty="0">
-                <a:hlinkClick r:id="rId2"/>
+                <a:hlinkClick r:id="rId1"/>
               </a:rPr>
               <a:t>5. Eksplorasi kode Python berikut:</a:t>
             </a:r>
+            <a:endParaRPr lang="id-ID" dirty="0"/>
           </a:p>
           <a:p>
             <a:endParaRPr lang="id-ID" dirty="0">
-              <a:hlinkClick r:id="rId2"/>
+              <a:hlinkClick r:id="rId1"/>
             </a:endParaRPr>
           </a:p>
           <a:p>
             <a:r>
               <a:rPr lang="id-ID" dirty="0">
-                <a:hlinkClick r:id="rId2"/>
+                <a:hlinkClick r:id="rId1"/>
               </a:rPr>
               <a:t>https://www.oreilly.com/library/view/machine-learning-with/9781491989371/ch01.html</a:t>
             </a:r>
@@ -6557,11 +6446,6 @@
         </p:txBody>
       </p:sp>
     </p:spTree>
-    <p:extLst>
-      <p:ext uri="{BB962C8B-B14F-4D97-AF65-F5344CB8AC3E}">
-        <p14:creationId xmlns:p14="http://schemas.microsoft.com/office/powerpoint/2010/main" val="2265943133"/>
-      </p:ext>
-    </p:extLst>
   </p:cSld>
   <p:clrMapOvr>
     <a:masterClrMapping/>
@@ -6588,13 +6472,7 @@
       </p:grpSpPr>
       <p:sp>
         <p:nvSpPr>
-          <p:cNvPr id="2" name="TextBox 1">
-            <a:extLst>
-              <a:ext uri="{FF2B5EF4-FFF2-40B4-BE49-F238E27FC236}">
-                <a16:creationId xmlns:a16="http://schemas.microsoft.com/office/drawing/2014/main" id="{CEE04709-7268-8FD9-D639-BCBE37191132}"/>
-              </a:ext>
-            </a:extLst>
-          </p:cNvPr>
+          <p:cNvPr id="2" name="TextBox 1"/>
           <p:cNvSpPr txBox="1"/>
           <p:nvPr/>
         </p:nvSpPr>
@@ -6616,27 +6494,22 @@
           <a:p>
             <a:r>
               <a:rPr lang="id-ID" altLang="ko-KR" sz="1400" b="1" dirty="0">
-                <a:cs typeface="Arial" pitchFamily="34" charset="0"/>
+                <a:cs typeface="Arial" panose="02080604020202020204" pitchFamily="34" charset="0"/>
               </a:rPr>
               <a:t>6. Silahkan review penerapan vektor atau skalar dalam kehidupan sehari-hari.</a:t>
             </a:r>
             <a:br>
               <a:rPr lang="id-ID" altLang="ko-KR" sz="1400" b="1" dirty="0">
-                <a:cs typeface="Arial" pitchFamily="34" charset="0"/>
+                <a:cs typeface="Arial" panose="02080604020202020204" pitchFamily="34" charset="0"/>
               </a:rPr>
             </a:br>
             <a:endParaRPr lang="en-US" altLang="ko-KR" sz="1400" b="1" dirty="0">
-              <a:cs typeface="Arial" pitchFamily="34" charset="0"/>
+              <a:cs typeface="Arial" panose="02080604020202020204" pitchFamily="34" charset="0"/>
             </a:endParaRPr>
           </a:p>
         </p:txBody>
       </p:sp>
     </p:spTree>
-    <p:extLst>
-      <p:ext uri="{BB962C8B-B14F-4D97-AF65-F5344CB8AC3E}">
-        <p14:creationId xmlns:p14="http://schemas.microsoft.com/office/powerpoint/2010/main" val="632544152"/>
-      </p:ext>
-    </p:extLst>
   </p:cSld>
   <p:clrMapOvr>
     <a:masterClrMapping/>
@@ -6795,20 +6668,14 @@
       </p:grpSpPr>
       <p:pic>
         <p:nvPicPr>
-          <p:cNvPr id="4" name="Picture 3">
-            <a:extLst>
-              <a:ext uri="{FF2B5EF4-FFF2-40B4-BE49-F238E27FC236}">
-                <a16:creationId xmlns:a16="http://schemas.microsoft.com/office/drawing/2014/main" id="{CA437BE5-EC8E-936F-F9A2-DD01128684A3}"/>
-              </a:ext>
-            </a:extLst>
-          </p:cNvPr>
+          <p:cNvPr id="4" name="Picture 3"/>
           <p:cNvPicPr>
             <a:picLocks noChangeAspect="1"/>
           </p:cNvPicPr>
           <p:nvPr/>
         </p:nvPicPr>
         <p:blipFill>
-          <a:blip r:embed="rId2"/>
+          <a:blip r:embed="rId1"/>
           <a:stretch>
             <a:fillRect/>
           </a:stretch>
@@ -6825,22 +6692,18 @@
       </p:pic>
       <p:pic>
         <p:nvPicPr>
-          <p:cNvPr id="6" name="Picture 5">
-            <a:extLst>
-              <a:ext uri="{FF2B5EF4-FFF2-40B4-BE49-F238E27FC236}">
-                <a16:creationId xmlns:a16="http://schemas.microsoft.com/office/drawing/2014/main" id="{0B07FDD6-74CD-1B21-09FE-6F319A3FA161}"/>
-              </a:ext>
-            </a:extLst>
-          </p:cNvPr>
+          <p:cNvPr id="6" name="Picture 5"/>
           <p:cNvPicPr>
             <a:picLocks noChangeAspect="1"/>
           </p:cNvPicPr>
           <p:nvPr/>
         </p:nvPicPr>
         <p:blipFill rotWithShape="1">
-          <a:blip r:embed="rId3"/>
+          <a:blip r:embed="rId2"/>
           <a:srcRect l="6624" r="20566"/>
-          <a:stretch/>
+          <a:stretch>
+            <a:fillRect/>
+          </a:stretch>
         </p:blipFill>
         <p:spPr>
           <a:xfrm>
@@ -6853,11 +6716,6 @@
         </p:spPr>
       </p:pic>
     </p:spTree>
-    <p:extLst>
-      <p:ext uri="{BB962C8B-B14F-4D97-AF65-F5344CB8AC3E}">
-        <p14:creationId xmlns:p14="http://schemas.microsoft.com/office/powerpoint/2010/main" val="3488201081"/>
-      </p:ext>
-    </p:extLst>
   </p:cSld>
   <p:clrMapOvr>
     <a:masterClrMapping/>
@@ -7010,7 +6868,7 @@
                     <a:lumOff val="25000"/>
                   </a:schemeClr>
                 </a:solidFill>
-                <a:cs typeface="Arial" pitchFamily="34" charset="0"/>
+                <a:cs typeface="Arial" panose="02080604020202020204" pitchFamily="34" charset="0"/>
               </a:rPr>
               <a:t>Besaran </a:t>
             </a:r>
@@ -7019,7 +6877,7 @@
                 <a:solidFill>
                   <a:srgbClr val="EE6816"/>
                 </a:solidFill>
-                <a:cs typeface="Arial" pitchFamily="34" charset="0"/>
+                <a:cs typeface="Arial" panose="02080604020202020204" pitchFamily="34" charset="0"/>
               </a:rPr>
               <a:t>Skalar</a:t>
             </a:r>
@@ -7027,20 +6885,14 @@
               <a:solidFill>
                 <a:srgbClr val="EE6816"/>
               </a:solidFill>
-              <a:cs typeface="Arial" pitchFamily="34" charset="0"/>
+              <a:cs typeface="Arial" panose="02080604020202020204" pitchFamily="34" charset="0"/>
             </a:endParaRPr>
           </a:p>
         </p:txBody>
       </p:sp>
       <p:sp>
         <p:nvSpPr>
-          <p:cNvPr id="8" name="TextBox 7">
-            <a:extLst>
-              <a:ext uri="{FF2B5EF4-FFF2-40B4-BE49-F238E27FC236}">
-                <a16:creationId xmlns:a16="http://schemas.microsoft.com/office/drawing/2014/main" id="{9DAFA89B-187A-4BED-9FD8-365A6ADC9456}"/>
-              </a:ext>
-            </a:extLst>
-          </p:cNvPr>
+          <p:cNvPr id="8" name="TextBox 7"/>
           <p:cNvSpPr txBox="1"/>
           <p:nvPr/>
         </p:nvSpPr>
@@ -7073,7 +6925,7 @@
                     <a:lumOff val="25000"/>
                   </a:schemeClr>
                 </a:solidFill>
-                <a:cs typeface="Arial" pitchFamily="34" charset="0"/>
+                <a:cs typeface="Arial" panose="02080604020202020204" pitchFamily="34" charset="0"/>
               </a:rPr>
               <a:t>Besaran yang didefinisikan oleh satu bilangan dengan satuan yang sesuai. Misal panjang, luas, volume, massa, waktu, dll. Setelah satuan dinyatakan, besaran dilambangkan dengan ukuran atau besarannya.</a:t>
             </a:r>
@@ -7084,20 +6936,14 @@
                   <a:lumOff val="25000"/>
                 </a:schemeClr>
               </a:solidFill>
-              <a:cs typeface="Arial" pitchFamily="34" charset="0"/>
+              <a:cs typeface="Arial" panose="02080604020202020204" pitchFamily="34" charset="0"/>
             </a:endParaRPr>
           </a:p>
         </p:txBody>
       </p:sp>
       <p:sp>
         <p:nvSpPr>
-          <p:cNvPr id="9" name="TextBox 8">
-            <a:extLst>
-              <a:ext uri="{FF2B5EF4-FFF2-40B4-BE49-F238E27FC236}">
-                <a16:creationId xmlns:a16="http://schemas.microsoft.com/office/drawing/2014/main" id="{25B47B75-40C1-40EB-A375-9628A1DB9D63}"/>
-              </a:ext>
-            </a:extLst>
-          </p:cNvPr>
+          <p:cNvPr id="9" name="TextBox 8"/>
           <p:cNvSpPr txBox="1"/>
           <p:nvPr/>
         </p:nvSpPr>
@@ -7125,7 +6971,7 @@
                     <a:lumOff val="25000"/>
                   </a:schemeClr>
                 </a:solidFill>
-                <a:cs typeface="Arial" pitchFamily="34" charset="0"/>
+                <a:cs typeface="Arial" panose="02080604020202020204" pitchFamily="34" charset="0"/>
               </a:rPr>
               <a:t>Besaran </a:t>
             </a:r>
@@ -7134,7 +6980,7 @@
                 <a:solidFill>
                   <a:srgbClr val="2C9BA4"/>
                 </a:solidFill>
-                <a:cs typeface="Arial" pitchFamily="34" charset="0"/>
+                <a:cs typeface="Arial" panose="02080604020202020204" pitchFamily="34" charset="0"/>
               </a:rPr>
               <a:t>Vektor</a:t>
             </a:r>
@@ -7142,20 +6988,14 @@
               <a:solidFill>
                 <a:srgbClr val="2C9BA4"/>
               </a:solidFill>
-              <a:cs typeface="Arial" pitchFamily="34" charset="0"/>
+              <a:cs typeface="Arial" panose="02080604020202020204" pitchFamily="34" charset="0"/>
             </a:endParaRPr>
           </a:p>
         </p:txBody>
       </p:sp>
       <p:sp>
         <p:nvSpPr>
-          <p:cNvPr id="10" name="TextBox 9">
-            <a:extLst>
-              <a:ext uri="{FF2B5EF4-FFF2-40B4-BE49-F238E27FC236}">
-                <a16:creationId xmlns:a16="http://schemas.microsoft.com/office/drawing/2014/main" id="{0BF32383-1AD2-4731-852F-A17F45426FA4}"/>
-              </a:ext>
-            </a:extLst>
-          </p:cNvPr>
+          <p:cNvPr id="10" name="TextBox 9"/>
           <p:cNvSpPr txBox="1"/>
           <p:nvPr/>
         </p:nvSpPr>
@@ -7188,7 +7028,7 @@
                     <a:lumOff val="25000"/>
                   </a:schemeClr>
                 </a:solidFill>
-                <a:cs typeface="Arial" pitchFamily="34" charset="0"/>
+                <a:cs typeface="Arial" panose="02080604020202020204" pitchFamily="34" charset="0"/>
               </a:rPr>
               <a:t>Besaran yang didefinisikan ketika tidak hanya diketahui besarannya (dengan satuan) tetapi juga arah pengoperasiannya. Misal kekuatan, kecepatan, percepatan. Besaran vektor melibatkan arah dan juga besaran.</a:t>
             </a:r>
@@ -7199,27 +7039,21 @@
                   <a:lumOff val="25000"/>
                 </a:schemeClr>
               </a:solidFill>
-              <a:cs typeface="Arial" pitchFamily="34" charset="0"/>
+              <a:cs typeface="Arial" panose="02080604020202020204" pitchFamily="34" charset="0"/>
             </a:endParaRPr>
           </a:p>
         </p:txBody>
       </p:sp>
       <p:pic>
         <p:nvPicPr>
-          <p:cNvPr id="11" name="Picture 10">
-            <a:extLst>
-              <a:ext uri="{FF2B5EF4-FFF2-40B4-BE49-F238E27FC236}">
-                <a16:creationId xmlns:a16="http://schemas.microsoft.com/office/drawing/2014/main" id="{F0DB570B-C9F5-49C8-ACE1-FCCC2F5E2001}"/>
-              </a:ext>
-            </a:extLst>
-          </p:cNvPr>
+          <p:cNvPr id="11" name="Picture 10"/>
           <p:cNvPicPr>
             <a:picLocks noChangeAspect="1"/>
           </p:cNvPicPr>
           <p:nvPr/>
         </p:nvPicPr>
         <p:blipFill>
-          <a:blip r:embed="rId2" cstate="print">
+          <a:blip r:embed="rId1" cstate="print">
             <a:extLst>
               <a:ext uri="{28A0092B-C50C-407E-A947-70E740481C1C}">
                 <a14:useLocalDpi xmlns:a14="http://schemas.microsoft.com/office/drawing/2010/main" val="0"/>
@@ -7265,11 +7099,6 @@
         </p:spPr>
       </p:pic>
     </p:spTree>
-    <p:extLst>
-      <p:ext uri="{BB962C8B-B14F-4D97-AF65-F5344CB8AC3E}">
-        <p14:creationId xmlns:p14="http://schemas.microsoft.com/office/powerpoint/2010/main" val="3012196229"/>
-      </p:ext>
-    </p:extLst>
   </p:cSld>
   <p:clrMapOvr>
     <a:masterClrMapping/>
@@ -7795,17 +7624,11 @@
           </a:p>
         </p:txBody>
       </p:sp>
-      <mc:AlternateContent xmlns:mc="http://schemas.openxmlformats.org/markup-compatibility/2006" xmlns:a14="http://schemas.microsoft.com/office/drawing/2010/main">
-        <mc:Choice Requires="a14">
+      <mc:AlternateContent xmlns:mc="http://schemas.openxmlformats.org/markup-compatibility/2006">
+        <mc:Choice xmlns:a14="http://schemas.microsoft.com/office/drawing/2010/main" Requires="a14">
           <p:sp>
             <p:nvSpPr>
-              <p:cNvPr id="8" name="TextBox 7">
-                <a:extLst>
-                  <a:ext uri="{FF2B5EF4-FFF2-40B4-BE49-F238E27FC236}">
-                    <a16:creationId xmlns:a16="http://schemas.microsoft.com/office/drawing/2014/main" id="{9DAFA89B-187A-4BED-9FD8-365A6ADC9456}"/>
-                  </a:ext>
-                </a:extLst>
-              </p:cNvPr>
+              <p:cNvPr id="8" name="TextBox 7"/>
               <p:cNvSpPr txBox="1"/>
               <p:nvPr/>
             </p:nvSpPr>
@@ -7839,7 +7662,7 @@
                         <a:lumOff val="25000"/>
                       </a:schemeClr>
                     </a:solidFill>
-                    <a:cs typeface="Arial" pitchFamily="34" charset="0"/>
+                    <a:cs typeface="Arial" panose="02080604020202020204" pitchFamily="34" charset="0"/>
                   </a:rPr>
                   <a:t>Kecepatan </a:t>
                 </a:r>
@@ -7854,9 +7677,9 @@
                           </a:schemeClr>
                         </a:solidFill>
                         <a:latin typeface="Cambria Math" panose="02040503050406030204" pitchFamily="18" charset="0"/>
-                        <a:cs typeface="Arial" pitchFamily="34" charset="0"/>
+                        <a:cs typeface="Arial" panose="02080604020202020204" pitchFamily="34" charset="0"/>
                       </a:rPr>
-                      <m:t>10 </m:t>
+                      <m:t>10</m:t>
                     </m:r>
                     <m:r>
                       <a:rPr lang="en-US" altLang="ko-KR" sz="1600" b="0" i="1" smtClean="0">
@@ -7867,7 +7690,20 @@
                           </a:schemeClr>
                         </a:solidFill>
                         <a:latin typeface="Cambria Math" panose="02040503050406030204" pitchFamily="18" charset="0"/>
-                        <a:cs typeface="Arial" pitchFamily="34" charset="0"/>
+                        <a:cs typeface="Arial" panose="02080604020202020204" pitchFamily="34" charset="0"/>
+                      </a:rPr>
+                      <m:t> </m:t>
+                    </m:r>
+                    <m:r>
+                      <a:rPr lang="en-US" altLang="ko-KR" sz="1600" b="0" i="1" smtClean="0">
+                        <a:solidFill>
+                          <a:schemeClr val="tx1">
+                            <a:lumMod val="75000"/>
+                            <a:lumOff val="25000"/>
+                          </a:schemeClr>
+                        </a:solidFill>
+                        <a:latin typeface="Cambria Math" panose="02040503050406030204" pitchFamily="18" charset="0"/>
+                        <a:cs typeface="Arial" panose="02080604020202020204" pitchFamily="34" charset="0"/>
                       </a:rPr>
                       <m:t>𝑘𝑚</m:t>
                     </m:r>
@@ -7880,7 +7716,7 @@
                           </a:schemeClr>
                         </a:solidFill>
                         <a:latin typeface="Cambria Math" panose="02040503050406030204" pitchFamily="18" charset="0"/>
-                        <a:cs typeface="Arial" pitchFamily="34" charset="0"/>
+                        <a:cs typeface="Arial" panose="02080604020202020204" pitchFamily="34" charset="0"/>
                       </a:rPr>
                       <m:t>/</m:t>
                     </m:r>
@@ -7893,7 +7729,7 @@
                           </a:schemeClr>
                         </a:solidFill>
                         <a:latin typeface="Cambria Math" panose="02040503050406030204" pitchFamily="18" charset="0"/>
-                        <a:cs typeface="Arial" pitchFamily="34" charset="0"/>
+                        <a:cs typeface="Arial" panose="02080604020202020204" pitchFamily="34" charset="0"/>
                       </a:rPr>
                       <m:t>𝑗𝑎𝑚</m:t>
                     </m:r>
@@ -7907,7 +7743,7 @@
                         <a:lumOff val="25000"/>
                       </a:schemeClr>
                     </a:solidFill>
-                    <a:cs typeface="Arial" pitchFamily="34" charset="0"/>
+                    <a:cs typeface="Arial" panose="02080604020202020204" pitchFamily="34" charset="0"/>
                   </a:rPr>
                   <a:t> </a:t>
                 </a:r>
@@ -7919,10 +7755,19 @@
                         <a:lumOff val="25000"/>
                       </a:schemeClr>
                     </a:solidFill>
-                    <a:cs typeface="Arial" pitchFamily="34" charset="0"/>
+                    <a:cs typeface="Arial" panose="02080604020202020204" pitchFamily="34" charset="0"/>
                   </a:rPr>
                   <a:t>adalah besaran skalar, tetapi</a:t>
                 </a:r>
+                <a:endParaRPr lang="en-US" altLang="ko-KR" sz="1600">
+                  <a:solidFill>
+                    <a:schemeClr val="tx1">
+                      <a:lumMod val="75000"/>
+                      <a:lumOff val="25000"/>
+                    </a:schemeClr>
+                  </a:solidFill>
+                  <a:cs typeface="Arial" panose="02080604020202020204" pitchFamily="34" charset="0"/>
+                </a:endParaRPr>
               </a:p>
               <a:p>
                 <a:pPr marL="342900" indent="-342900">
@@ -7939,7 +7784,7 @@
                         <a:lumOff val="25000"/>
                       </a:schemeClr>
                     </a:solidFill>
-                    <a:cs typeface="Arial" pitchFamily="34" charset="0"/>
+                    <a:cs typeface="Arial" panose="02080604020202020204" pitchFamily="34" charset="0"/>
                   </a:rPr>
                   <a:t>Kecepatan ‘</a:t>
                 </a:r>
@@ -7954,9 +7799,9 @@
                           </a:schemeClr>
                         </a:solidFill>
                         <a:latin typeface="Cambria Math" panose="02040503050406030204" pitchFamily="18" charset="0"/>
-                        <a:cs typeface="Arial" pitchFamily="34" charset="0"/>
+                        <a:cs typeface="Arial" panose="02080604020202020204" pitchFamily="34" charset="0"/>
                       </a:rPr>
-                      <m:t>10 </m:t>
+                      <m:t>10</m:t>
                     </m:r>
                     <m:r>
                       <a:rPr lang="en-US" altLang="ko-KR" sz="1600" b="0" i="1" smtClean="0">
@@ -7967,7 +7812,20 @@
                           </a:schemeClr>
                         </a:solidFill>
                         <a:latin typeface="Cambria Math" panose="02040503050406030204" pitchFamily="18" charset="0"/>
-                        <a:cs typeface="Arial" pitchFamily="34" charset="0"/>
+                        <a:cs typeface="Arial" panose="02080604020202020204" pitchFamily="34" charset="0"/>
+                      </a:rPr>
+                      <m:t> </m:t>
+                    </m:r>
+                    <m:r>
+                      <a:rPr lang="en-US" altLang="ko-KR" sz="1600" b="0" i="1" smtClean="0">
+                        <a:solidFill>
+                          <a:schemeClr val="tx1">
+                            <a:lumMod val="75000"/>
+                            <a:lumOff val="25000"/>
+                          </a:schemeClr>
+                        </a:solidFill>
+                        <a:latin typeface="Cambria Math" panose="02040503050406030204" pitchFamily="18" charset="0"/>
+                        <a:cs typeface="Arial" panose="02080604020202020204" pitchFamily="34" charset="0"/>
                       </a:rPr>
                       <m:t>𝑘𝑚</m:t>
                     </m:r>
@@ -7980,7 +7838,7 @@
                           </a:schemeClr>
                         </a:solidFill>
                         <a:latin typeface="Cambria Math" panose="02040503050406030204" pitchFamily="18" charset="0"/>
-                        <a:cs typeface="Arial" pitchFamily="34" charset="0"/>
+                        <a:cs typeface="Arial" panose="02080604020202020204" pitchFamily="34" charset="0"/>
                       </a:rPr>
                       <m:t>/</m:t>
                     </m:r>
@@ -7993,7 +7851,7 @@
                           </a:schemeClr>
                         </a:solidFill>
                         <a:latin typeface="Cambria Math" panose="02040503050406030204" pitchFamily="18" charset="0"/>
-                        <a:cs typeface="Arial" pitchFamily="34" charset="0"/>
+                        <a:cs typeface="Arial" panose="02080604020202020204" pitchFamily="34" charset="0"/>
                       </a:rPr>
                       <m:t>𝑗𝑎𝑚</m:t>
                     </m:r>
@@ -8007,7 +7865,7 @@
                         <a:lumOff val="25000"/>
                       </a:schemeClr>
                     </a:solidFill>
-                    <a:cs typeface="Arial" pitchFamily="34" charset="0"/>
+                    <a:cs typeface="Arial" panose="02080604020202020204" pitchFamily="34" charset="0"/>
                   </a:rPr>
                   <a:t> </a:t>
                 </a:r>
@@ -8019,7 +7877,7 @@
                         <a:lumOff val="25000"/>
                       </a:schemeClr>
                     </a:solidFill>
-                    <a:cs typeface="Arial" pitchFamily="34" charset="0"/>
+                    <a:cs typeface="Arial" panose="02080604020202020204" pitchFamily="34" charset="0"/>
                   </a:rPr>
                   <a:t>ke utara’ adalah besaran vektor</a:t>
                 </a:r>
@@ -8030,22 +7888,16 @@
                       <a:lumOff val="25000"/>
                     </a:schemeClr>
                   </a:solidFill>
-                  <a:cs typeface="Arial" pitchFamily="34" charset="0"/>
+                  <a:cs typeface="Arial" panose="02080604020202020204" pitchFamily="34" charset="0"/>
                 </a:endParaRPr>
               </a:p>
             </p:txBody>
           </p:sp>
         </mc:Choice>
-        <mc:Fallback xmlns="">
+        <mc:Fallback>
           <p:sp>
             <p:nvSpPr>
-              <p:cNvPr id="8" name="TextBox 7">
-                <a:extLst>
-                  <a:ext uri="{FF2B5EF4-FFF2-40B4-BE49-F238E27FC236}">
-                    <a16:creationId xmlns:a16="http://schemas.microsoft.com/office/drawing/2014/main" id="{9DAFA89B-187A-4BED-9FD8-365A6ADC9456}"/>
-                  </a:ext>
-                </a:extLst>
-              </p:cNvPr>
+              <p:cNvPr id="8" name="TextBox 7"/>
               <p:cNvSpPr txBox="1">
                 <a:spLocks noRot="1" noChangeAspect="1" noMove="1" noResize="1" noEditPoints="1" noAdjustHandles="1" noChangeArrowheads="1" noChangeShapeType="1" noTextEdit="1"/>
               </p:cNvSpPr>
@@ -8059,10 +7911,10 @@
               <a:prstGeom prst="rect">
                 <a:avLst/>
               </a:prstGeom>
-              <a:blipFill>
-                <a:blip r:embed="rId2"/>
+              <a:blipFill rotWithShape="1">
+                <a:blip r:embed="rId1"/>
                 <a:stretch>
-                  <a:fillRect l="-429" b="-9302"/>
+                  <a:fillRect l="-6" t="-64" b="-46609"/>
                 </a:stretch>
               </a:blipFill>
             </p:spPr>
@@ -8071,7 +7923,7 @@
               <a:lstStyle/>
               <a:p>
                 <a:r>
-                  <a:rPr lang="en-ID">
+                  <a:rPr lang="en-US" altLang="en-US">
                     <a:noFill/>
                   </a:rPr>
                   <a:t> </a:t>
@@ -8081,17 +7933,11 @@
           </p:sp>
         </mc:Fallback>
       </mc:AlternateContent>
-      <mc:AlternateContent xmlns:mc="http://schemas.openxmlformats.org/markup-compatibility/2006" xmlns:a14="http://schemas.microsoft.com/office/drawing/2010/main">
-        <mc:Choice Requires="a14">
+      <mc:AlternateContent xmlns:mc="http://schemas.openxmlformats.org/markup-compatibility/2006">
+        <mc:Choice xmlns:a14="http://schemas.microsoft.com/office/drawing/2010/main" Requires="a14">
           <p:sp>
             <p:nvSpPr>
-              <p:cNvPr id="10" name="TextBox 9">
-                <a:extLst>
-                  <a:ext uri="{FF2B5EF4-FFF2-40B4-BE49-F238E27FC236}">
-                    <a16:creationId xmlns:a16="http://schemas.microsoft.com/office/drawing/2014/main" id="{0BF32383-1AD2-4731-852F-A17F45426FA4}"/>
-                  </a:ext>
-                </a:extLst>
-              </p:cNvPr>
+              <p:cNvPr id="10" name="TextBox 9"/>
               <p:cNvSpPr txBox="1"/>
               <p:nvPr/>
             </p:nvSpPr>
@@ -8124,7 +7970,7 @@
                         <a:lumOff val="25000"/>
                       </a:schemeClr>
                     </a:solidFill>
-                    <a:cs typeface="Arial" pitchFamily="34" charset="0"/>
+                    <a:cs typeface="Arial" panose="02080604020202020204" pitchFamily="34" charset="0"/>
                   </a:rPr>
                   <a:t>Gaya </a:t>
                 </a:r>
@@ -8139,7 +7985,7 @@
                           </a:schemeClr>
                         </a:solidFill>
                         <a:latin typeface="Cambria Math" panose="02040503050406030204" pitchFamily="18" charset="0"/>
-                        <a:cs typeface="Arial" pitchFamily="34" charset="0"/>
+                        <a:cs typeface="Arial" panose="02080604020202020204" pitchFamily="34" charset="0"/>
                       </a:rPr>
                       <m:t>𝐹</m:t>
                     </m:r>
@@ -8153,7 +7999,7 @@
                         <a:lumOff val="25000"/>
                       </a:schemeClr>
                     </a:solidFill>
-                    <a:cs typeface="Arial" pitchFamily="34" charset="0"/>
+                    <a:cs typeface="Arial" panose="02080604020202020204" pitchFamily="34" charset="0"/>
                   </a:rPr>
                   <a:t> </a:t>
                 </a:r>
@@ -8165,7 +8011,7 @@
                         <a:lumOff val="25000"/>
                       </a:schemeClr>
                     </a:solidFill>
-                    <a:cs typeface="Arial" pitchFamily="34" charset="0"/>
+                    <a:cs typeface="Arial" panose="02080604020202020204" pitchFamily="34" charset="0"/>
                   </a:rPr>
                   <a:t>yang bekerja di titilk </a:t>
                 </a:r>
@@ -8180,7 +8026,7 @@
                           </a:schemeClr>
                         </a:solidFill>
                         <a:latin typeface="Cambria Math" panose="02040503050406030204" pitchFamily="18" charset="0"/>
-                        <a:cs typeface="Arial" pitchFamily="34" charset="0"/>
+                        <a:cs typeface="Arial" panose="02080604020202020204" pitchFamily="34" charset="0"/>
                       </a:rPr>
                       <m:t>𝑃</m:t>
                     </m:r>
@@ -8194,7 +8040,7 @@
                         <a:lumOff val="25000"/>
                       </a:schemeClr>
                     </a:solidFill>
-                    <a:cs typeface="Arial" pitchFamily="34" charset="0"/>
+                    <a:cs typeface="Arial" panose="02080604020202020204" pitchFamily="34" charset="0"/>
                   </a:rPr>
                   <a:t> </a:t>
                 </a:r>
@@ -8206,10 +8052,19 @@
                         <a:lumOff val="25000"/>
                       </a:schemeClr>
                     </a:solidFill>
-                    <a:cs typeface="Arial" pitchFamily="34" charset="0"/>
+                    <a:cs typeface="Arial" panose="02080604020202020204" pitchFamily="34" charset="0"/>
                   </a:rPr>
                   <a:t>merupakan besaran vektor, karena untuk mendefinisikannya harus memberikan :</a:t>
                 </a:r>
+                <a:endParaRPr lang="en-US" altLang="ko-KR" sz="1600">
+                  <a:solidFill>
+                    <a:schemeClr val="tx1">
+                      <a:lumMod val="75000"/>
+                      <a:lumOff val="25000"/>
+                    </a:schemeClr>
+                  </a:solidFill>
+                  <a:cs typeface="Arial" panose="02080604020202020204" pitchFamily="34" charset="0"/>
+                </a:endParaRPr>
               </a:p>
               <a:p>
                 <a:pPr marL="342900" indent="-342900">
@@ -8226,10 +8081,19 @@
                         <a:lumOff val="25000"/>
                       </a:schemeClr>
                     </a:solidFill>
-                    <a:cs typeface="Arial" pitchFamily="34" charset="0"/>
+                    <a:cs typeface="Arial" panose="02080604020202020204" pitchFamily="34" charset="0"/>
                   </a:rPr>
                   <a:t>Besaran, dan</a:t>
                 </a:r>
+                <a:endParaRPr lang="en-US" altLang="ko-KR" sz="1600">
+                  <a:solidFill>
+                    <a:schemeClr val="tx1">
+                      <a:lumMod val="75000"/>
+                      <a:lumOff val="25000"/>
+                    </a:schemeClr>
+                  </a:solidFill>
+                  <a:cs typeface="Arial" panose="02080604020202020204" pitchFamily="34" charset="0"/>
+                </a:endParaRPr>
               </a:p>
               <a:p>
                 <a:pPr marL="342900" indent="-342900">
@@ -8246,7 +8110,7 @@
                         <a:lumOff val="25000"/>
                       </a:schemeClr>
                     </a:solidFill>
-                    <a:cs typeface="Arial" pitchFamily="34" charset="0"/>
+                    <a:cs typeface="Arial" panose="02080604020202020204" pitchFamily="34" charset="0"/>
                   </a:rPr>
                   <a:t>Arah </a:t>
                 </a:r>
@@ -8257,22 +8121,16 @@
                       <a:lumOff val="25000"/>
                     </a:schemeClr>
                   </a:solidFill>
-                  <a:cs typeface="Arial" pitchFamily="34" charset="0"/>
+                  <a:cs typeface="Arial" panose="02080604020202020204" pitchFamily="34" charset="0"/>
                 </a:endParaRPr>
               </a:p>
             </p:txBody>
           </p:sp>
         </mc:Choice>
-        <mc:Fallback xmlns="">
+        <mc:Fallback>
           <p:sp>
             <p:nvSpPr>
-              <p:cNvPr id="10" name="TextBox 9">
-                <a:extLst>
-                  <a:ext uri="{FF2B5EF4-FFF2-40B4-BE49-F238E27FC236}">
-                    <a16:creationId xmlns:a16="http://schemas.microsoft.com/office/drawing/2014/main" id="{0BF32383-1AD2-4731-852F-A17F45426FA4}"/>
-                  </a:ext>
-                </a:extLst>
-              </p:cNvPr>
+              <p:cNvPr id="10" name="TextBox 9"/>
               <p:cNvSpPr txBox="1">
                 <a:spLocks noRot="1" noChangeAspect="1" noMove="1" noResize="1" noEditPoints="1" noAdjustHandles="1" noChangeArrowheads="1" noChangeShapeType="1" noTextEdit="1"/>
               </p:cNvSpPr>
@@ -8286,10 +8144,10 @@
               <a:prstGeom prst="rect">
                 <a:avLst/>
               </a:prstGeom>
-              <a:blipFill>
-                <a:blip r:embed="rId3"/>
+              <a:blipFill rotWithShape="1">
+                <a:blip r:embed="rId2"/>
                 <a:stretch>
-                  <a:fillRect l="-700" b="-3548"/>
+                  <a:fillRect l="-7" r="1" b="22"/>
                 </a:stretch>
               </a:blipFill>
             </p:spPr>
@@ -8298,7 +8156,7 @@
               <a:lstStyle/>
               <a:p>
                 <a:r>
-                  <a:rPr lang="en-ID">
+                  <a:rPr lang="en-US" altLang="en-US">
                     <a:noFill/>
                   </a:rPr>
                   <a:t> </a:t>
@@ -8310,13 +8168,7 @@
       </mc:AlternateContent>
       <p:sp>
         <p:nvSpPr>
-          <p:cNvPr id="11" name="TextBox 10">
-            <a:extLst>
-              <a:ext uri="{FF2B5EF4-FFF2-40B4-BE49-F238E27FC236}">
-                <a16:creationId xmlns:a16="http://schemas.microsoft.com/office/drawing/2014/main" id="{862E696D-D515-4ECF-9133-5A2D314B62F8}"/>
-              </a:ext>
-            </a:extLst>
-          </p:cNvPr>
+          <p:cNvPr id="11" name="TextBox 10"/>
           <p:cNvSpPr txBox="1"/>
           <p:nvPr/>
         </p:nvSpPr>
@@ -8341,7 +8193,7 @@
                 <a:solidFill>
                   <a:srgbClr val="FFFFFF"/>
                 </a:solidFill>
-                <a:cs typeface="Arial" pitchFamily="34" charset="0"/>
+                <a:cs typeface="Arial" panose="02080604020202020204" pitchFamily="34" charset="0"/>
               </a:rPr>
               <a:t>CONTOH</a:t>
             </a:r>
@@ -8349,27 +8201,21 @@
               <a:solidFill>
                 <a:srgbClr val="FFFFFF"/>
               </a:solidFill>
-              <a:cs typeface="Arial" pitchFamily="34" charset="0"/>
+              <a:cs typeface="Arial" panose="02080604020202020204" pitchFamily="34" charset="0"/>
             </a:endParaRPr>
           </a:p>
         </p:txBody>
       </p:sp>
       <p:pic>
         <p:nvPicPr>
-          <p:cNvPr id="3" name="Picture 2">
-            <a:extLst>
-              <a:ext uri="{FF2B5EF4-FFF2-40B4-BE49-F238E27FC236}">
-                <a16:creationId xmlns:a16="http://schemas.microsoft.com/office/drawing/2014/main" id="{0E1F31A1-1A40-4DC6-B362-6A162CA2D9C9}"/>
-              </a:ext>
-            </a:extLst>
-          </p:cNvPr>
+          <p:cNvPr id="3" name="Picture 2"/>
           <p:cNvPicPr>
             <a:picLocks noChangeAspect="1"/>
           </p:cNvPicPr>
           <p:nvPr/>
         </p:nvPicPr>
         <p:blipFill>
-          <a:blip r:embed="rId4"/>
+          <a:blip r:embed="rId3"/>
           <a:stretch>
             <a:fillRect/>
           </a:stretch>
@@ -8386,13 +8232,7 @@
       </p:pic>
       <p:sp>
         <p:nvSpPr>
-          <p:cNvPr id="13" name="TextBox 12">
-            <a:extLst>
-              <a:ext uri="{FF2B5EF4-FFF2-40B4-BE49-F238E27FC236}">
-                <a16:creationId xmlns:a16="http://schemas.microsoft.com/office/drawing/2014/main" id="{2BE9135E-5129-438C-930D-39EBB1CDABB1}"/>
-              </a:ext>
-            </a:extLst>
-          </p:cNvPr>
+          <p:cNvPr id="13" name="TextBox 12"/>
           <p:cNvSpPr txBox="1"/>
           <p:nvPr/>
         </p:nvSpPr>
@@ -8425,7 +8265,7 @@
                     <a:lumOff val="25000"/>
                   </a:schemeClr>
                 </a:solidFill>
-                <a:cs typeface="Arial" pitchFamily="34" charset="0"/>
+                <a:cs typeface="Arial" panose="02080604020202020204" pitchFamily="34" charset="0"/>
               </a:rPr>
               <a:t>Contoh 1</a:t>
             </a:r>
@@ -8433,20 +8273,14 @@
               <a:solidFill>
                 <a:srgbClr val="EE6816"/>
               </a:solidFill>
-              <a:cs typeface="Arial" pitchFamily="34" charset="0"/>
+              <a:cs typeface="Arial" panose="02080604020202020204" pitchFamily="34" charset="0"/>
             </a:endParaRPr>
           </a:p>
         </p:txBody>
       </p:sp>
       <p:sp>
         <p:nvSpPr>
-          <p:cNvPr id="15" name="TextBox 14">
-            <a:extLst>
-              <a:ext uri="{FF2B5EF4-FFF2-40B4-BE49-F238E27FC236}">
-                <a16:creationId xmlns:a16="http://schemas.microsoft.com/office/drawing/2014/main" id="{77A55ABC-C818-4DA0-BBA5-4B621CA6E295}"/>
-              </a:ext>
-            </a:extLst>
-          </p:cNvPr>
+          <p:cNvPr id="15" name="TextBox 14"/>
           <p:cNvSpPr txBox="1"/>
           <p:nvPr/>
         </p:nvSpPr>
@@ -8479,7 +8313,7 @@
                     <a:lumOff val="25000"/>
                   </a:schemeClr>
                 </a:solidFill>
-                <a:cs typeface="Arial" pitchFamily="34" charset="0"/>
+                <a:cs typeface="Arial" panose="02080604020202020204" pitchFamily="34" charset="0"/>
               </a:rPr>
               <a:t>Contoh 2</a:t>
             </a:r>
@@ -8487,27 +8321,21 @@
               <a:solidFill>
                 <a:srgbClr val="EE6816"/>
               </a:solidFill>
-              <a:cs typeface="Arial" pitchFamily="34" charset="0"/>
+              <a:cs typeface="Arial" panose="02080604020202020204" pitchFamily="34" charset="0"/>
             </a:endParaRPr>
           </a:p>
         </p:txBody>
       </p:sp>
       <p:pic>
         <p:nvPicPr>
-          <p:cNvPr id="12" name="Picture 11">
-            <a:extLst>
-              <a:ext uri="{FF2B5EF4-FFF2-40B4-BE49-F238E27FC236}">
-                <a16:creationId xmlns:a16="http://schemas.microsoft.com/office/drawing/2014/main" id="{F9954409-49FD-4C59-B322-D0D576453024}"/>
-              </a:ext>
-            </a:extLst>
-          </p:cNvPr>
+          <p:cNvPr id="12" name="Picture 11"/>
           <p:cNvPicPr>
             <a:picLocks noChangeAspect="1"/>
           </p:cNvPicPr>
           <p:nvPr/>
         </p:nvPicPr>
         <p:blipFill>
-          <a:blip r:embed="rId5" cstate="print">
+          <a:blip r:embed="rId4" cstate="print">
             <a:extLst>
               <a:ext uri="{28A0092B-C50C-407E-A947-70E740481C1C}">
                 <a14:useLocalDpi xmlns:a14="http://schemas.microsoft.com/office/drawing/2010/main" val="0"/>
@@ -8553,11 +8381,6 @@
         </p:spPr>
       </p:pic>
     </p:spTree>
-    <p:extLst>
-      <p:ext uri="{BB962C8B-B14F-4D97-AF65-F5344CB8AC3E}">
-        <p14:creationId xmlns:p14="http://schemas.microsoft.com/office/powerpoint/2010/main" val="3962034625"/>
-      </p:ext>
-    </p:extLst>
   </p:cSld>
   <p:clrMapOvr>
     <a:masterClrMapping/>
@@ -9024,13 +8847,7 @@
       </p:grpSpPr>
       <p:sp>
         <p:nvSpPr>
-          <p:cNvPr id="2" name="TextBox 1">
-            <a:extLst>
-              <a:ext uri="{FF2B5EF4-FFF2-40B4-BE49-F238E27FC236}">
-                <a16:creationId xmlns:a16="http://schemas.microsoft.com/office/drawing/2014/main" id="{4180B7A4-970E-4DE3-A65C-CFD56DBA33DD}"/>
-              </a:ext>
-            </a:extLst>
-          </p:cNvPr>
+          <p:cNvPr id="2" name="TextBox 1"/>
           <p:cNvSpPr txBox="1"/>
           <p:nvPr/>
         </p:nvSpPr>
@@ -9057,7 +8874,7 @@
                     <a:lumMod val="75000"/>
                   </a:schemeClr>
                 </a:solidFill>
-                <a:cs typeface="Arial" pitchFamily="34" charset="0"/>
+                <a:cs typeface="Arial" panose="02080604020202020204" pitchFamily="34" charset="0"/>
               </a:rPr>
               <a:t>Latihan</a:t>
             </a:r>
@@ -9069,7 +8886,7 @@
                     <a:lumOff val="25000"/>
                   </a:schemeClr>
                 </a:solidFill>
-                <a:cs typeface="Arial" pitchFamily="34" charset="0"/>
+                <a:cs typeface="Arial" panose="02080604020202020204" pitchFamily="34" charset="0"/>
               </a:rPr>
               <a:t> </a:t>
             </a:r>
@@ -9078,7 +8895,7 @@
                 <a:solidFill>
                   <a:srgbClr val="F2A40D"/>
                 </a:solidFill>
-                <a:cs typeface="Arial" pitchFamily="34" charset="0"/>
+                <a:cs typeface="Arial" panose="02080604020202020204" pitchFamily="34" charset="0"/>
               </a:rPr>
               <a:t>Soal</a:t>
             </a:r>
@@ -9087,7 +8904,7 @@
                 <a:solidFill>
                   <a:srgbClr val="F2A40D"/>
                 </a:solidFill>
-                <a:cs typeface="Arial" pitchFamily="34" charset="0"/>
+                <a:cs typeface="Arial" panose="02080604020202020204" pitchFamily="34" charset="0"/>
               </a:rPr>
               <a:t> 1</a:t>
             </a:r>
@@ -9095,22 +8912,16 @@
               <a:solidFill>
                 <a:srgbClr val="F2A40D"/>
               </a:solidFill>
-              <a:cs typeface="Arial" pitchFamily="34" charset="0"/>
+              <a:cs typeface="Arial" panose="02080604020202020204" pitchFamily="34" charset="0"/>
             </a:endParaRPr>
           </a:p>
         </p:txBody>
       </p:sp>
-      <mc:AlternateContent xmlns:mc="http://schemas.openxmlformats.org/markup-compatibility/2006" xmlns:a14="http://schemas.microsoft.com/office/drawing/2010/main">
-        <mc:Choice Requires="a14">
+      <mc:AlternateContent xmlns:mc="http://schemas.openxmlformats.org/markup-compatibility/2006">
+        <mc:Choice xmlns:a14="http://schemas.microsoft.com/office/drawing/2010/main" Requires="a14">
           <p:sp>
             <p:nvSpPr>
-              <p:cNvPr id="3" name="TextBox 2">
-                <a:extLst>
-                  <a:ext uri="{FF2B5EF4-FFF2-40B4-BE49-F238E27FC236}">
-                    <a16:creationId xmlns:a16="http://schemas.microsoft.com/office/drawing/2014/main" id="{12662D5F-019C-4DAC-9C0C-D92A6222BFDE}"/>
-                  </a:ext>
-                </a:extLst>
-              </p:cNvPr>
+              <p:cNvPr id="3" name="TextBox 2"/>
               <p:cNvSpPr txBox="1"/>
               <p:nvPr/>
             </p:nvSpPr>
@@ -9140,7 +8951,7 @@
                     <a:solidFill>
                       <a:schemeClr val="tx1"/>
                     </a:solidFill>
-                    <a:cs typeface="Arial" pitchFamily="34" charset="0"/>
+                    <a:cs typeface="Arial" panose="02080604020202020204" pitchFamily="34" charset="0"/>
                   </a:rPr>
                   <a:t>1. </a:t>
                 </a:r>
@@ -9149,7 +8960,7 @@
                     <a:solidFill>
                       <a:schemeClr val="tx1"/>
                     </a:solidFill>
-                    <a:cs typeface="Arial" pitchFamily="34" charset="0"/>
+                    <a:cs typeface="Arial" panose="02080604020202020204" pitchFamily="34" charset="0"/>
                   </a:rPr>
                   <a:t>Suhu</a:t>
                 </a:r>
@@ -9158,7 +8969,7 @@
                     <a:solidFill>
                       <a:schemeClr val="tx1"/>
                     </a:solidFill>
-                    <a:cs typeface="Arial" pitchFamily="34" charset="0"/>
+                    <a:cs typeface="Arial" panose="02080604020202020204" pitchFamily="34" charset="0"/>
                   </a:rPr>
                   <a:t> </a:t>
                 </a:r>
@@ -9170,7 +8981,7 @@
                           <a:schemeClr val="tx1"/>
                         </a:solidFill>
                         <a:latin typeface="Cambria Math" panose="02040503050406030204" pitchFamily="18" charset="0"/>
-                        <a:cs typeface="Arial" pitchFamily="34" charset="0"/>
+                        <a:cs typeface="Arial" panose="02080604020202020204" pitchFamily="34" charset="0"/>
                       </a:rPr>
                       <m:t>100</m:t>
                     </m:r>
@@ -9181,7 +8992,7 @@
                         </a:solidFill>
                         <a:latin typeface="Cambria Math" panose="02040503050406030204" pitchFamily="18" charset="0"/>
                         <a:ea typeface="Cambria Math" panose="02040503050406030204" pitchFamily="18" charset="0"/>
-                        <a:cs typeface="Arial" pitchFamily="34" charset="0"/>
+                        <a:cs typeface="Arial" panose="02080604020202020204" pitchFamily="34" charset="0"/>
                       </a:rPr>
                       <m:t>°</m:t>
                     </m:r>
@@ -9192,7 +9003,7 @@
                         </a:solidFill>
                         <a:latin typeface="Cambria Math" panose="02040503050406030204" pitchFamily="18" charset="0"/>
                         <a:ea typeface="Cambria Math" panose="02040503050406030204" pitchFamily="18" charset="0"/>
-                        <a:cs typeface="Arial" pitchFamily="34" charset="0"/>
+                        <a:cs typeface="Arial" panose="02080604020202020204" pitchFamily="34" charset="0"/>
                       </a:rPr>
                       <m:t>𝐶</m:t>
                     </m:r>
@@ -9203,7 +9014,7 @@
                     <a:solidFill>
                       <a:schemeClr val="tx1"/>
                     </a:solidFill>
-                    <a:cs typeface="Arial" pitchFamily="34" charset="0"/>
+                    <a:cs typeface="Arial" panose="02080604020202020204" pitchFamily="34" charset="0"/>
                   </a:rPr>
                   <a:t> </a:t>
                 </a:r>
@@ -9212,7 +9023,7 @@
                     <a:solidFill>
                       <a:schemeClr val="tx1"/>
                     </a:solidFill>
-                    <a:cs typeface="Arial" pitchFamily="34" charset="0"/>
+                    <a:cs typeface="Arial" panose="02080604020202020204" pitchFamily="34" charset="0"/>
                   </a:rPr>
                   <a:t>adalah</a:t>
                 </a:r>
@@ -9221,7 +9032,7 @@
                     <a:solidFill>
                       <a:schemeClr val="tx1"/>
                     </a:solidFill>
-                    <a:cs typeface="Arial" pitchFamily="34" charset="0"/>
+                    <a:cs typeface="Arial" panose="02080604020202020204" pitchFamily="34" charset="0"/>
                   </a:rPr>
                   <a:t> </a:t>
                 </a:r>
@@ -9230,7 +9041,7 @@
                     <a:solidFill>
                       <a:schemeClr val="tx1"/>
                     </a:solidFill>
-                    <a:cs typeface="Arial" pitchFamily="34" charset="0"/>
+                    <a:cs typeface="Arial" panose="02080604020202020204" pitchFamily="34" charset="0"/>
                   </a:rPr>
                   <a:t>besaran</a:t>
                 </a:r>
@@ -9239,10 +9050,16 @@
                     <a:solidFill>
                       <a:schemeClr val="tx1"/>
                     </a:solidFill>
-                    <a:cs typeface="Arial" pitchFamily="34" charset="0"/>
+                    <a:cs typeface="Arial" panose="02080604020202020204" pitchFamily="34" charset="0"/>
                   </a:rPr>
                   <a:t> . . .</a:t>
                 </a:r>
+                <a:endParaRPr lang="en-US" altLang="ko-KR" dirty="0">
+                  <a:solidFill>
+                    <a:schemeClr val="tx1"/>
+                  </a:solidFill>
+                  <a:cs typeface="Arial" panose="02080604020202020204" pitchFamily="34" charset="0"/>
+                </a:endParaRPr>
               </a:p>
               <a:p>
                 <a:pPr>
@@ -9255,7 +9072,7 @@
                     <a:solidFill>
                       <a:schemeClr val="tx1"/>
                     </a:solidFill>
-                    <a:cs typeface="Arial" pitchFamily="34" charset="0"/>
+                    <a:cs typeface="Arial" panose="02080604020202020204" pitchFamily="34" charset="0"/>
                   </a:rPr>
                   <a:t>2. </a:t>
                 </a:r>
@@ -9264,7 +9081,7 @@
                     <a:solidFill>
                       <a:schemeClr val="tx1"/>
                     </a:solidFill>
-                    <a:cs typeface="Arial" pitchFamily="34" charset="0"/>
+                    <a:cs typeface="Arial" panose="02080604020202020204" pitchFamily="34" charset="0"/>
                   </a:rPr>
                   <a:t>Percepatan</a:t>
                 </a:r>
@@ -9273,7 +9090,7 @@
                     <a:solidFill>
                       <a:schemeClr val="tx1"/>
                     </a:solidFill>
-                    <a:cs typeface="Arial" pitchFamily="34" charset="0"/>
+                    <a:cs typeface="Arial" panose="02080604020202020204" pitchFamily="34" charset="0"/>
                   </a:rPr>
                   <a:t> </a:t>
                 </a:r>
@@ -9285,9 +9102,9 @@
                           <a:schemeClr val="tx1"/>
                         </a:solidFill>
                         <a:latin typeface="Cambria Math" panose="02040503050406030204" pitchFamily="18" charset="0"/>
-                        <a:cs typeface="Arial" pitchFamily="34" charset="0"/>
+                        <a:cs typeface="Arial" panose="02080604020202020204" pitchFamily="34" charset="0"/>
                       </a:rPr>
-                      <m:t>9,8 </m:t>
+                      <m:t>9</m:t>
                     </m:r>
                     <m:r>
                       <a:rPr lang="en-US" altLang="ko-KR" b="0" i="1" smtClean="0">
@@ -9295,7 +9112,37 @@
                           <a:schemeClr val="tx1"/>
                         </a:solidFill>
                         <a:latin typeface="Cambria Math" panose="02040503050406030204" pitchFamily="18" charset="0"/>
-                        <a:cs typeface="Arial" pitchFamily="34" charset="0"/>
+                        <a:cs typeface="Arial" panose="02080604020202020204" pitchFamily="34" charset="0"/>
+                      </a:rPr>
+                      <m:t>,</m:t>
+                    </m:r>
+                    <m:r>
+                      <a:rPr lang="en-US" altLang="ko-KR" b="0" i="1" smtClean="0">
+                        <a:solidFill>
+                          <a:schemeClr val="tx1"/>
+                        </a:solidFill>
+                        <a:latin typeface="Cambria Math" panose="02040503050406030204" pitchFamily="18" charset="0"/>
+                        <a:cs typeface="Arial" panose="02080604020202020204" pitchFamily="34" charset="0"/>
+                      </a:rPr>
+                      <m:t>8</m:t>
+                    </m:r>
+                    <m:r>
+                      <a:rPr lang="en-US" altLang="ko-KR" b="0" i="1" smtClean="0">
+                        <a:solidFill>
+                          <a:schemeClr val="tx1"/>
+                        </a:solidFill>
+                        <a:latin typeface="Cambria Math" panose="02040503050406030204" pitchFamily="18" charset="0"/>
+                        <a:cs typeface="Arial" panose="02080604020202020204" pitchFamily="34" charset="0"/>
+                      </a:rPr>
+                      <m:t> </m:t>
+                    </m:r>
+                    <m:r>
+                      <a:rPr lang="en-US" altLang="ko-KR" b="0" i="1" smtClean="0">
+                        <a:solidFill>
+                          <a:schemeClr val="tx1"/>
+                        </a:solidFill>
+                        <a:latin typeface="Cambria Math" panose="02040503050406030204" pitchFamily="18" charset="0"/>
+                        <a:cs typeface="Arial" panose="02080604020202020204" pitchFamily="34" charset="0"/>
                       </a:rPr>
                       <m:t>𝑚</m:t>
                     </m:r>
@@ -9305,7 +9152,7 @@
                           <a:schemeClr val="tx1"/>
                         </a:solidFill>
                         <a:latin typeface="Cambria Math" panose="02040503050406030204" pitchFamily="18" charset="0"/>
-                        <a:cs typeface="Arial" pitchFamily="34" charset="0"/>
+                        <a:cs typeface="Arial" panose="02080604020202020204" pitchFamily="34" charset="0"/>
                       </a:rPr>
                       <m:t>/</m:t>
                     </m:r>
@@ -9317,7 +9164,7 @@
                               <a:schemeClr val="tx1"/>
                             </a:solidFill>
                             <a:latin typeface="Cambria Math" panose="02040503050406030204" pitchFamily="18" charset="0"/>
-                            <a:cs typeface="Arial" pitchFamily="34" charset="0"/>
+                            <a:cs typeface="Arial" panose="02080604020202020204" pitchFamily="34" charset="0"/>
                           </a:rPr>
                         </m:ctrlPr>
                       </m:sSupPr>
@@ -9328,7 +9175,7 @@
                               <a:schemeClr val="tx1"/>
                             </a:solidFill>
                             <a:latin typeface="Cambria Math" panose="02040503050406030204" pitchFamily="18" charset="0"/>
-                            <a:cs typeface="Arial" pitchFamily="34" charset="0"/>
+                            <a:cs typeface="Arial" panose="02080604020202020204" pitchFamily="34" charset="0"/>
                           </a:rPr>
                           <m:t>𝑠</m:t>
                         </m:r>
@@ -9340,7 +9187,7 @@
                               <a:schemeClr val="tx1"/>
                             </a:solidFill>
                             <a:latin typeface="Cambria Math" panose="02040503050406030204" pitchFamily="18" charset="0"/>
-                            <a:cs typeface="Arial" pitchFamily="34" charset="0"/>
+                            <a:cs typeface="Arial" panose="02080604020202020204" pitchFamily="34" charset="0"/>
                           </a:rPr>
                           <m:t>2</m:t>
                         </m:r>
@@ -9353,7 +9200,7 @@
                     <a:solidFill>
                       <a:schemeClr val="tx1"/>
                     </a:solidFill>
-                    <a:cs typeface="Arial" pitchFamily="34" charset="0"/>
+                    <a:cs typeface="Arial" panose="02080604020202020204" pitchFamily="34" charset="0"/>
                   </a:rPr>
                   <a:t> </a:t>
                 </a:r>
@@ -9362,7 +9209,7 @@
                     <a:solidFill>
                       <a:schemeClr val="tx1"/>
                     </a:solidFill>
-                    <a:cs typeface="Arial" pitchFamily="34" charset="0"/>
+                    <a:cs typeface="Arial" panose="02080604020202020204" pitchFamily="34" charset="0"/>
                   </a:rPr>
                   <a:t>vertikal</a:t>
                 </a:r>
@@ -9371,7 +9218,7 @@
                     <a:solidFill>
                       <a:schemeClr val="tx1"/>
                     </a:solidFill>
-                    <a:cs typeface="Arial" pitchFamily="34" charset="0"/>
+                    <a:cs typeface="Arial" panose="02080604020202020204" pitchFamily="34" charset="0"/>
                   </a:rPr>
                   <a:t> </a:t>
                 </a:r>
@@ -9380,7 +9227,7 @@
                     <a:solidFill>
                       <a:schemeClr val="tx1"/>
                     </a:solidFill>
-                    <a:cs typeface="Arial" pitchFamily="34" charset="0"/>
+                    <a:cs typeface="Arial" panose="02080604020202020204" pitchFamily="34" charset="0"/>
                   </a:rPr>
                   <a:t>ke</a:t>
                 </a:r>
@@ -9389,7 +9236,7 @@
                     <a:solidFill>
                       <a:schemeClr val="tx1"/>
                     </a:solidFill>
-                    <a:cs typeface="Arial" pitchFamily="34" charset="0"/>
+                    <a:cs typeface="Arial" panose="02080604020202020204" pitchFamily="34" charset="0"/>
                   </a:rPr>
                   <a:t> </a:t>
                 </a:r>
@@ -9398,7 +9245,7 @@
                     <a:solidFill>
                       <a:schemeClr val="tx1"/>
                     </a:solidFill>
-                    <a:cs typeface="Arial" pitchFamily="34" charset="0"/>
+                    <a:cs typeface="Arial" panose="02080604020202020204" pitchFamily="34" charset="0"/>
                   </a:rPr>
                   <a:t>bawah</a:t>
                 </a:r>
@@ -9407,7 +9254,7 @@
                     <a:solidFill>
                       <a:schemeClr val="tx1"/>
                     </a:solidFill>
-                    <a:cs typeface="Arial" pitchFamily="34" charset="0"/>
+                    <a:cs typeface="Arial" panose="02080604020202020204" pitchFamily="34" charset="0"/>
                   </a:rPr>
                   <a:t> </a:t>
                 </a:r>
@@ -9416,7 +9263,7 @@
                     <a:solidFill>
                       <a:schemeClr val="tx1"/>
                     </a:solidFill>
-                    <a:cs typeface="Arial" pitchFamily="34" charset="0"/>
+                    <a:cs typeface="Arial" panose="02080604020202020204" pitchFamily="34" charset="0"/>
                   </a:rPr>
                   <a:t>adalah</a:t>
                 </a:r>
@@ -9425,7 +9272,7 @@
                     <a:solidFill>
                       <a:schemeClr val="tx1"/>
                     </a:solidFill>
-                    <a:cs typeface="Arial" pitchFamily="34" charset="0"/>
+                    <a:cs typeface="Arial" panose="02080604020202020204" pitchFamily="34" charset="0"/>
                   </a:rPr>
                   <a:t> </a:t>
                 </a:r>
@@ -9434,7 +9281,7 @@
                     <a:solidFill>
                       <a:schemeClr val="tx1"/>
                     </a:solidFill>
-                    <a:cs typeface="Arial" pitchFamily="34" charset="0"/>
+                    <a:cs typeface="Arial" panose="02080604020202020204" pitchFamily="34" charset="0"/>
                   </a:rPr>
                   <a:t>besaran</a:t>
                 </a:r>
@@ -9443,10 +9290,16 @@
                     <a:solidFill>
                       <a:schemeClr val="tx1"/>
                     </a:solidFill>
-                    <a:cs typeface="Arial" pitchFamily="34" charset="0"/>
+                    <a:cs typeface="Arial" panose="02080604020202020204" pitchFamily="34" charset="0"/>
                   </a:rPr>
                   <a:t> . . .</a:t>
                 </a:r>
+                <a:endParaRPr lang="en-US" altLang="ko-KR" dirty="0">
+                  <a:solidFill>
+                    <a:schemeClr val="tx1"/>
+                  </a:solidFill>
+                  <a:cs typeface="Arial" panose="02080604020202020204" pitchFamily="34" charset="0"/>
+                </a:endParaRPr>
               </a:p>
               <a:p>
                 <a:pPr>
@@ -9459,7 +9312,7 @@
                     <a:solidFill>
                       <a:schemeClr val="tx1"/>
                     </a:solidFill>
-                    <a:cs typeface="Arial" pitchFamily="34" charset="0"/>
+                    <a:cs typeface="Arial" panose="02080604020202020204" pitchFamily="34" charset="0"/>
                   </a:rPr>
                   <a:t>3. </a:t>
                 </a:r>
@@ -9468,7 +9321,7 @@
                     <a:solidFill>
                       <a:schemeClr val="tx1"/>
                     </a:solidFill>
-                    <a:cs typeface="Arial" pitchFamily="34" charset="0"/>
+                    <a:cs typeface="Arial" panose="02080604020202020204" pitchFamily="34" charset="0"/>
                   </a:rPr>
                   <a:t>Berat</a:t>
                 </a:r>
@@ -9477,7 +9330,7 @@
                     <a:solidFill>
                       <a:schemeClr val="tx1"/>
                     </a:solidFill>
-                    <a:cs typeface="Arial" pitchFamily="34" charset="0"/>
+                    <a:cs typeface="Arial" panose="02080604020202020204" pitchFamily="34" charset="0"/>
                   </a:rPr>
                   <a:t> </a:t>
                 </a:r>
@@ -9486,7 +9339,7 @@
                     <a:solidFill>
                       <a:schemeClr val="tx1"/>
                     </a:solidFill>
-                    <a:cs typeface="Arial" pitchFamily="34" charset="0"/>
+                    <a:cs typeface="Arial" panose="02080604020202020204" pitchFamily="34" charset="0"/>
                   </a:rPr>
                   <a:t>massa</a:t>
                 </a:r>
@@ -9495,7 +9348,7 @@
                     <a:solidFill>
                       <a:schemeClr val="tx1"/>
                     </a:solidFill>
-                    <a:cs typeface="Arial" pitchFamily="34" charset="0"/>
+                    <a:cs typeface="Arial" panose="02080604020202020204" pitchFamily="34" charset="0"/>
                   </a:rPr>
                   <a:t> </a:t>
                 </a:r>
@@ -9507,9 +9360,9 @@
                           <a:schemeClr val="tx1"/>
                         </a:solidFill>
                         <a:latin typeface="Cambria Math" panose="02040503050406030204" pitchFamily="18" charset="0"/>
-                        <a:cs typeface="Arial" pitchFamily="34" charset="0"/>
+                        <a:cs typeface="Arial" panose="02080604020202020204" pitchFamily="34" charset="0"/>
                       </a:rPr>
-                      <m:t>7 </m:t>
+                      <m:t>7</m:t>
                     </m:r>
                     <m:r>
                       <a:rPr lang="en-US" altLang="ko-KR" b="0" i="1" smtClean="0">
@@ -9517,7 +9370,17 @@
                           <a:schemeClr val="tx1"/>
                         </a:solidFill>
                         <a:latin typeface="Cambria Math" panose="02040503050406030204" pitchFamily="18" charset="0"/>
-                        <a:cs typeface="Arial" pitchFamily="34" charset="0"/>
+                        <a:cs typeface="Arial" panose="02080604020202020204" pitchFamily="34" charset="0"/>
+                      </a:rPr>
+                      <m:t> </m:t>
+                    </m:r>
+                    <m:r>
+                      <a:rPr lang="en-US" altLang="ko-KR" b="0" i="1" smtClean="0">
+                        <a:solidFill>
+                          <a:schemeClr val="tx1"/>
+                        </a:solidFill>
+                        <a:latin typeface="Cambria Math" panose="02040503050406030204" pitchFamily="18" charset="0"/>
+                        <a:cs typeface="Arial" panose="02080604020202020204" pitchFamily="34" charset="0"/>
                       </a:rPr>
                       <m:t>𝑘𝑔</m:t>
                     </m:r>
@@ -9528,7 +9391,7 @@
                     <a:solidFill>
                       <a:schemeClr val="tx1"/>
                     </a:solidFill>
-                    <a:cs typeface="Arial" pitchFamily="34" charset="0"/>
+                    <a:cs typeface="Arial" panose="02080604020202020204" pitchFamily="34" charset="0"/>
                   </a:rPr>
                   <a:t> </a:t>
                 </a:r>
@@ -9537,7 +9400,7 @@
                     <a:solidFill>
                       <a:schemeClr val="tx1"/>
                     </a:solidFill>
-                    <a:cs typeface="Arial" pitchFamily="34" charset="0"/>
+                    <a:cs typeface="Arial" panose="02080604020202020204" pitchFamily="34" charset="0"/>
                   </a:rPr>
                   <a:t>adalah</a:t>
                 </a:r>
@@ -9546,7 +9409,7 @@
                     <a:solidFill>
                       <a:schemeClr val="tx1"/>
                     </a:solidFill>
-                    <a:cs typeface="Arial" pitchFamily="34" charset="0"/>
+                    <a:cs typeface="Arial" panose="02080604020202020204" pitchFamily="34" charset="0"/>
                   </a:rPr>
                   <a:t> </a:t>
                 </a:r>
@@ -9555,7 +9418,7 @@
                     <a:solidFill>
                       <a:schemeClr val="tx1"/>
                     </a:solidFill>
-                    <a:cs typeface="Arial" pitchFamily="34" charset="0"/>
+                    <a:cs typeface="Arial" panose="02080604020202020204" pitchFamily="34" charset="0"/>
                   </a:rPr>
                   <a:t>besaran</a:t>
                 </a:r>
@@ -9564,10 +9427,16 @@
                     <a:solidFill>
                       <a:schemeClr val="tx1"/>
                     </a:solidFill>
-                    <a:cs typeface="Arial" pitchFamily="34" charset="0"/>
+                    <a:cs typeface="Arial" panose="02080604020202020204" pitchFamily="34" charset="0"/>
                   </a:rPr>
                   <a:t> . . .</a:t>
                 </a:r>
+                <a:endParaRPr lang="en-US" altLang="ko-KR" dirty="0">
+                  <a:solidFill>
+                    <a:schemeClr val="tx1"/>
+                  </a:solidFill>
+                  <a:cs typeface="Arial" panose="02080604020202020204" pitchFamily="34" charset="0"/>
+                </a:endParaRPr>
               </a:p>
               <a:p>
                 <a:pPr>
@@ -9580,7 +9449,7 @@
                     <a:solidFill>
                       <a:schemeClr val="tx1"/>
                     </a:solidFill>
-                    <a:cs typeface="Arial" pitchFamily="34" charset="0"/>
+                    <a:cs typeface="Arial" panose="02080604020202020204" pitchFamily="34" charset="0"/>
                   </a:rPr>
                   <a:t>4. </a:t>
                 </a:r>
@@ -9589,7 +9458,7 @@
                     <a:solidFill>
                       <a:schemeClr val="tx1"/>
                     </a:solidFill>
-                    <a:cs typeface="Arial" pitchFamily="34" charset="0"/>
+                    <a:cs typeface="Arial" panose="02080604020202020204" pitchFamily="34" charset="0"/>
                   </a:rPr>
                   <a:t>Jumlah</a:t>
                 </a:r>
@@ -9598,7 +9467,7 @@
                     <a:solidFill>
                       <a:schemeClr val="tx1"/>
                     </a:solidFill>
-                    <a:cs typeface="Arial" pitchFamily="34" charset="0"/>
+                    <a:cs typeface="Arial" panose="02080604020202020204" pitchFamily="34" charset="0"/>
                   </a:rPr>
                   <a:t> </a:t>
                 </a:r>
@@ -9611,7 +9480,16 @@
                         </a:solidFill>
                         <a:latin typeface="Cambria Math" panose="02040503050406030204" pitchFamily="18" charset="0"/>
                       </a:rPr>
-                      <m:t>£500</m:t>
+                      <m:t>£</m:t>
+                    </m:r>
+                    <m:r>
+                      <a:rPr lang="en-US" i="1" smtClean="0">
+                        <a:solidFill>
+                          <a:schemeClr val="tx1"/>
+                        </a:solidFill>
+                        <a:latin typeface="Cambria Math" panose="02040503050406030204" pitchFamily="18" charset="0"/>
+                      </a:rPr>
+                      <m:t>500</m:t>
                     </m:r>
                   </m:oMath>
                 </a14:m>
@@ -9659,22 +9537,16 @@
                   <a:solidFill>
                     <a:schemeClr val="tx1"/>
                   </a:solidFill>
-                  <a:cs typeface="Arial" pitchFamily="34" charset="0"/>
+                  <a:cs typeface="Arial" panose="02080604020202020204" pitchFamily="34" charset="0"/>
                 </a:endParaRPr>
               </a:p>
             </p:txBody>
           </p:sp>
         </mc:Choice>
-        <mc:Fallback xmlns="">
+        <mc:Fallback>
           <p:sp>
             <p:nvSpPr>
-              <p:cNvPr id="3" name="TextBox 2">
-                <a:extLst>
-                  <a:ext uri="{FF2B5EF4-FFF2-40B4-BE49-F238E27FC236}">
-                    <a16:creationId xmlns:a16="http://schemas.microsoft.com/office/drawing/2014/main" id="{12662D5F-019C-4DAC-9C0C-D92A6222BFDE}"/>
-                  </a:ext>
-                </a:extLst>
-              </p:cNvPr>
+              <p:cNvPr id="3" name="TextBox 2"/>
               <p:cNvSpPr txBox="1">
                 <a:spLocks noRot="1" noChangeAspect="1" noMove="1" noResize="1" noEditPoints="1" noAdjustHandles="1" noChangeArrowheads="1" noChangeShapeType="1" noTextEdit="1"/>
               </p:cNvSpPr>
@@ -9688,10 +9560,10 @@
               <a:prstGeom prst="rect">
                 <a:avLst/>
               </a:prstGeom>
-              <a:blipFill>
-                <a:blip r:embed="rId2"/>
+              <a:blipFill rotWithShape="1">
+                <a:blip r:embed="rId1"/>
                 <a:stretch>
-                  <a:fillRect l="-713" b="-4643"/>
+                  <a:fillRect l="-4" t="-16" r="3" b="-583"/>
                 </a:stretch>
               </a:blipFill>
             </p:spPr>
@@ -9700,7 +9572,7 @@
               <a:lstStyle/>
               <a:p>
                 <a:r>
-                  <a:rPr lang="en-ID">
+                  <a:rPr lang="en-US" altLang="en-US">
                     <a:noFill/>
                   </a:rPr>
                   <a:t> </a:t>
@@ -9712,13 +9584,7 @@
       </mc:AlternateContent>
       <p:sp>
         <p:nvSpPr>
-          <p:cNvPr id="4" name="TextBox 3">
-            <a:extLst>
-              <a:ext uri="{FF2B5EF4-FFF2-40B4-BE49-F238E27FC236}">
-                <a16:creationId xmlns:a16="http://schemas.microsoft.com/office/drawing/2014/main" id="{D1494CCE-4CC7-4281-82BE-F30100F11962}"/>
-              </a:ext>
-            </a:extLst>
-          </p:cNvPr>
+          <p:cNvPr id="4" name="TextBox 3"/>
           <p:cNvSpPr txBox="1"/>
           <p:nvPr/>
         </p:nvSpPr>
@@ -9748,7 +9614,7 @@
                 <a:solidFill>
                   <a:schemeClr val="tx1"/>
                 </a:solidFill>
-                <a:cs typeface="Arial" pitchFamily="34" charset="0"/>
+                <a:cs typeface="Arial" panose="02080604020202020204" pitchFamily="34" charset="0"/>
               </a:rPr>
               <a:t>“Setelah melengkapi soal-soal tersebut, diketahui bahwa besaran tidak hanya mencakup </a:t>
             </a:r>
@@ -9757,7 +9623,7 @@
                 <a:solidFill>
                   <a:schemeClr val="tx1"/>
                 </a:solidFill>
-                <a:cs typeface="Arial" pitchFamily="34" charset="0"/>
+                <a:cs typeface="Arial" panose="02080604020202020204" pitchFamily="34" charset="0"/>
               </a:rPr>
               <a:t>ukuran</a:t>
             </a:r>
@@ -9766,7 +9632,7 @@
                 <a:solidFill>
                   <a:schemeClr val="tx1"/>
                 </a:solidFill>
-                <a:cs typeface="Arial" pitchFamily="34" charset="0"/>
+                <a:cs typeface="Arial" panose="02080604020202020204" pitchFamily="34" charset="0"/>
               </a:rPr>
               <a:t> tetapi juga </a:t>
             </a:r>
@@ -9775,7 +9641,7 @@
                 <a:solidFill>
                   <a:schemeClr val="tx1"/>
                 </a:solidFill>
-                <a:cs typeface="Arial" pitchFamily="34" charset="0"/>
+                <a:cs typeface="Arial" panose="02080604020202020204" pitchFamily="34" charset="0"/>
               </a:rPr>
               <a:t>arah</a:t>
             </a:r>
@@ -9784,7 +9650,7 @@
                 <a:solidFill>
                   <a:schemeClr val="tx1"/>
                 </a:solidFill>
-                <a:cs typeface="Arial" pitchFamily="34" charset="0"/>
+                <a:cs typeface="Arial" panose="02080604020202020204" pitchFamily="34" charset="0"/>
               </a:rPr>
               <a:t>.”</a:t>
             </a:r>
@@ -9792,27 +9658,21 @@
               <a:solidFill>
                 <a:schemeClr val="tx1"/>
               </a:solidFill>
-              <a:cs typeface="Arial" pitchFamily="34" charset="0"/>
+              <a:cs typeface="Arial" panose="02080604020202020204" pitchFamily="34" charset="0"/>
             </a:endParaRPr>
           </a:p>
         </p:txBody>
       </p:sp>
       <p:pic>
         <p:nvPicPr>
-          <p:cNvPr id="5" name="Picture 4">
-            <a:extLst>
-              <a:ext uri="{FF2B5EF4-FFF2-40B4-BE49-F238E27FC236}">
-                <a16:creationId xmlns:a16="http://schemas.microsoft.com/office/drawing/2014/main" id="{461E46C8-E84E-473C-B3FF-D75717AB33ED}"/>
-              </a:ext>
-            </a:extLst>
-          </p:cNvPr>
+          <p:cNvPr id="5" name="Picture 4"/>
           <p:cNvPicPr>
             <a:picLocks noChangeAspect="1"/>
           </p:cNvPicPr>
           <p:nvPr/>
         </p:nvPicPr>
         <p:blipFill>
-          <a:blip r:embed="rId3" cstate="print">
+          <a:blip r:embed="rId2" cstate="print">
             <a:extLst>
               <a:ext uri="{28A0092B-C50C-407E-A947-70E740481C1C}">
                 <a14:useLocalDpi xmlns:a14="http://schemas.microsoft.com/office/drawing/2010/main" val="0"/>
@@ -9858,11 +9718,6 @@
         </p:spPr>
       </p:pic>
     </p:spTree>
-    <p:extLst>
-      <p:ext uri="{BB962C8B-B14F-4D97-AF65-F5344CB8AC3E}">
-        <p14:creationId xmlns:p14="http://schemas.microsoft.com/office/powerpoint/2010/main" val="987368288"/>
-      </p:ext>
-    </p:extLst>
   </p:cSld>
   <p:clrMapOvr>
     <a:masterClrMapping/>
@@ -10178,13 +10033,7 @@
       </p:grpSpPr>
       <p:sp>
         <p:nvSpPr>
-          <p:cNvPr id="3" name="TextBox 2">
-            <a:extLst>
-              <a:ext uri="{FF2B5EF4-FFF2-40B4-BE49-F238E27FC236}">
-                <a16:creationId xmlns:a16="http://schemas.microsoft.com/office/drawing/2014/main" id="{1AD6832A-664D-5460-43B2-1C363DD89621}"/>
-              </a:ext>
-            </a:extLst>
-          </p:cNvPr>
+          <p:cNvPr id="3" name="TextBox 2"/>
           <p:cNvSpPr txBox="1"/>
           <p:nvPr/>
         </p:nvSpPr>
@@ -10237,20 +10086,14 @@
       </p:sp>
       <p:pic>
         <p:nvPicPr>
-          <p:cNvPr id="6" name="Picture 5">
-            <a:extLst>
-              <a:ext uri="{FF2B5EF4-FFF2-40B4-BE49-F238E27FC236}">
-                <a16:creationId xmlns:a16="http://schemas.microsoft.com/office/drawing/2014/main" id="{FA0E2340-82B9-D505-8891-672DE51C1CCD}"/>
-              </a:ext>
-            </a:extLst>
-          </p:cNvPr>
+          <p:cNvPr id="6" name="Picture 5"/>
           <p:cNvPicPr>
             <a:picLocks noChangeAspect="1"/>
           </p:cNvPicPr>
           <p:nvPr/>
         </p:nvPicPr>
         <p:blipFill>
-          <a:blip r:embed="rId2"/>
+          <a:blip r:embed="rId1"/>
           <a:stretch>
             <a:fillRect/>
           </a:stretch>
@@ -10267,13 +10110,7 @@
       </p:pic>
       <p:sp>
         <p:nvSpPr>
-          <p:cNvPr id="7" name="TextBox 6">
-            <a:extLst>
-              <a:ext uri="{FF2B5EF4-FFF2-40B4-BE49-F238E27FC236}">
-                <a16:creationId xmlns:a16="http://schemas.microsoft.com/office/drawing/2014/main" id="{9195DA6C-43F2-28E3-FA29-FA59FB3149AA}"/>
-              </a:ext>
-            </a:extLst>
-          </p:cNvPr>
+          <p:cNvPr id="7" name="TextBox 6"/>
           <p:cNvSpPr txBox="1"/>
           <p:nvPr/>
         </p:nvSpPr>
@@ -10298,7 +10135,7 @@
                 <a:solidFill>
                   <a:srgbClr val="F2A40D"/>
                 </a:solidFill>
-                <a:cs typeface="Arial" pitchFamily="34" charset="0"/>
+                <a:cs typeface="Arial" panose="02080604020202020204" pitchFamily="34" charset="0"/>
               </a:rPr>
               <a:t>2)Silahkan jalankan kode berikut dan jelaskan hasil outputnya</a:t>
             </a:r>
@@ -10306,17 +10143,12 @@
               <a:solidFill>
                 <a:srgbClr val="F2A40D"/>
               </a:solidFill>
-              <a:cs typeface="Arial" pitchFamily="34" charset="0"/>
+              <a:cs typeface="Arial" panose="02080604020202020204" pitchFamily="34" charset="0"/>
             </a:endParaRPr>
           </a:p>
         </p:txBody>
       </p:sp>
     </p:spTree>
-    <p:extLst>
-      <p:ext uri="{BB962C8B-B14F-4D97-AF65-F5344CB8AC3E}">
-        <p14:creationId xmlns:p14="http://schemas.microsoft.com/office/powerpoint/2010/main" val="201511658"/>
-      </p:ext>
-    </p:extLst>
   </p:cSld>
   <p:clrMapOvr>
     <a:masterClrMapping/>
@@ -10475,20 +10307,14 @@
       </p:grpSpPr>
       <p:pic>
         <p:nvPicPr>
-          <p:cNvPr id="3" name="Picture 2">
-            <a:extLst>
-              <a:ext uri="{FF2B5EF4-FFF2-40B4-BE49-F238E27FC236}">
-                <a16:creationId xmlns:a16="http://schemas.microsoft.com/office/drawing/2014/main" id="{31321E4A-9D82-8FDF-28C6-73F88DED4C5F}"/>
-              </a:ext>
-            </a:extLst>
-          </p:cNvPr>
+          <p:cNvPr id="3" name="Picture 2"/>
           <p:cNvPicPr>
             <a:picLocks noChangeAspect="1"/>
           </p:cNvPicPr>
           <p:nvPr/>
         </p:nvPicPr>
         <p:blipFill>
-          <a:blip r:embed="rId2"/>
+          <a:blip r:embed="rId1"/>
           <a:stretch>
             <a:fillRect/>
           </a:stretch>
@@ -10505,13 +10331,7 @@
       </p:pic>
       <p:sp>
         <p:nvSpPr>
-          <p:cNvPr id="4" name="TextBox 3">
-            <a:extLst>
-              <a:ext uri="{FF2B5EF4-FFF2-40B4-BE49-F238E27FC236}">
-                <a16:creationId xmlns:a16="http://schemas.microsoft.com/office/drawing/2014/main" id="{2BC2CDD3-2DA9-0F36-65C5-95F784A86BA0}"/>
-              </a:ext>
-            </a:extLst>
-          </p:cNvPr>
+          <p:cNvPr id="4" name="TextBox 3"/>
           <p:cNvSpPr txBox="1"/>
           <p:nvPr/>
         </p:nvSpPr>
@@ -10536,7 +10356,7 @@
                 <a:solidFill>
                   <a:srgbClr val="F2A40D"/>
                 </a:solidFill>
-                <a:cs typeface="Arial" pitchFamily="34" charset="0"/>
+                <a:cs typeface="Arial" panose="02080604020202020204" pitchFamily="34" charset="0"/>
               </a:rPr>
               <a:t>3.Silahkan jalankan kode berikut dan jelaskan hasil outputnya</a:t>
             </a:r>
@@ -10544,17 +10364,12 @@
               <a:solidFill>
                 <a:srgbClr val="F2A40D"/>
               </a:solidFill>
-              <a:cs typeface="Arial" pitchFamily="34" charset="0"/>
+              <a:cs typeface="Arial" panose="02080604020202020204" pitchFamily="34" charset="0"/>
             </a:endParaRPr>
           </a:p>
         </p:txBody>
       </p:sp>
     </p:spTree>
-    <p:extLst>
-      <p:ext uri="{BB962C8B-B14F-4D97-AF65-F5344CB8AC3E}">
-        <p14:creationId xmlns:p14="http://schemas.microsoft.com/office/powerpoint/2010/main" val="1179369994"/>
-      </p:ext>
-    </p:extLst>
   </p:cSld>
   <p:clrMapOvr>
     <a:masterClrMapping/>
@@ -10713,20 +10528,14 @@
       </p:grpSpPr>
       <p:pic>
         <p:nvPicPr>
-          <p:cNvPr id="3" name="Picture 2">
-            <a:extLst>
-              <a:ext uri="{FF2B5EF4-FFF2-40B4-BE49-F238E27FC236}">
-                <a16:creationId xmlns:a16="http://schemas.microsoft.com/office/drawing/2014/main" id="{14DB4E8D-F401-0C18-AE29-99F9DC26CCA3}"/>
-              </a:ext>
-            </a:extLst>
-          </p:cNvPr>
+          <p:cNvPr id="3" name="Picture 2"/>
           <p:cNvPicPr>
             <a:picLocks noChangeAspect="1"/>
           </p:cNvPicPr>
           <p:nvPr/>
         </p:nvPicPr>
         <p:blipFill>
-          <a:blip r:embed="rId2"/>
+          <a:blip r:embed="rId1"/>
           <a:stretch>
             <a:fillRect/>
           </a:stretch>
@@ -10743,13 +10552,7 @@
       </p:pic>
       <p:sp>
         <p:nvSpPr>
-          <p:cNvPr id="4" name="TextBox 3">
-            <a:extLst>
-              <a:ext uri="{FF2B5EF4-FFF2-40B4-BE49-F238E27FC236}">
-                <a16:creationId xmlns:a16="http://schemas.microsoft.com/office/drawing/2014/main" id="{BBA9B0A5-F812-0D48-AB05-F77C01D42246}"/>
-              </a:ext>
-            </a:extLst>
-          </p:cNvPr>
+          <p:cNvPr id="4" name="TextBox 3"/>
           <p:cNvSpPr txBox="1"/>
           <p:nvPr/>
         </p:nvSpPr>
@@ -10774,7 +10577,7 @@
                 <a:solidFill>
                   <a:srgbClr val="F2A40D"/>
                 </a:solidFill>
-                <a:cs typeface="Arial" pitchFamily="34" charset="0"/>
+                <a:cs typeface="Arial" panose="02080604020202020204" pitchFamily="34" charset="0"/>
               </a:rPr>
               <a:t>4.Silahkan jalankan kode berikut dan jelaskan hasil outputnya</a:t>
             </a:r>
@@ -10782,17 +10585,12 @@
               <a:solidFill>
                 <a:srgbClr val="F2A40D"/>
               </a:solidFill>
-              <a:cs typeface="Arial" pitchFamily="34" charset="0"/>
+              <a:cs typeface="Arial" panose="02080604020202020204" pitchFamily="34" charset="0"/>
             </a:endParaRPr>
           </a:p>
         </p:txBody>
       </p:sp>
     </p:spTree>
-    <p:extLst>
-      <p:ext uri="{BB962C8B-B14F-4D97-AF65-F5344CB8AC3E}">
-        <p14:creationId xmlns:p14="http://schemas.microsoft.com/office/powerpoint/2010/main" val="3316959085"/>
-      </p:ext>
-    </p:extLst>
   </p:cSld>
   <p:clrMapOvr>
     <a:masterClrMapping/>
@@ -10951,20 +10749,14 @@
       </p:grpSpPr>
       <p:pic>
         <p:nvPicPr>
-          <p:cNvPr id="3" name="Picture 2">
-            <a:extLst>
-              <a:ext uri="{FF2B5EF4-FFF2-40B4-BE49-F238E27FC236}">
-                <a16:creationId xmlns:a16="http://schemas.microsoft.com/office/drawing/2014/main" id="{7B7D6AA7-4C0C-A557-90DB-A5F3F49DCEFC}"/>
-              </a:ext>
-            </a:extLst>
-          </p:cNvPr>
+          <p:cNvPr id="3" name="Picture 2"/>
           <p:cNvPicPr>
             <a:picLocks noChangeAspect="1"/>
           </p:cNvPicPr>
           <p:nvPr/>
         </p:nvPicPr>
         <p:blipFill>
-          <a:blip r:embed="rId2"/>
+          <a:blip r:embed="rId1"/>
           <a:stretch>
             <a:fillRect/>
           </a:stretch>
@@ -10981,13 +10773,7 @@
       </p:pic>
       <p:sp>
         <p:nvSpPr>
-          <p:cNvPr id="4" name="TextBox 3">
-            <a:extLst>
-              <a:ext uri="{FF2B5EF4-FFF2-40B4-BE49-F238E27FC236}">
-                <a16:creationId xmlns:a16="http://schemas.microsoft.com/office/drawing/2014/main" id="{9EF9EFE0-047C-6C92-20B0-18C863F5782B}"/>
-              </a:ext>
-            </a:extLst>
-          </p:cNvPr>
+          <p:cNvPr id="4" name="TextBox 3"/>
           <p:cNvSpPr txBox="1"/>
           <p:nvPr/>
         </p:nvSpPr>
@@ -11012,7 +10798,7 @@
                 <a:solidFill>
                   <a:srgbClr val="F2A40D"/>
                 </a:solidFill>
-                <a:cs typeface="Arial" pitchFamily="34" charset="0"/>
+                <a:cs typeface="Arial" panose="02080604020202020204" pitchFamily="34" charset="0"/>
               </a:rPr>
               <a:t>Tambahkan kode sebelumnya dengan kode ini dan amati hasilnya </a:t>
             </a:r>
@@ -11020,17 +10806,12 @@
               <a:solidFill>
                 <a:srgbClr val="F2A40D"/>
               </a:solidFill>
-              <a:cs typeface="Arial" pitchFamily="34" charset="0"/>
+              <a:cs typeface="Arial" panose="02080604020202020204" pitchFamily="34" charset="0"/>
             </a:endParaRPr>
           </a:p>
         </p:txBody>
       </p:sp>
     </p:spTree>
-    <p:extLst>
-      <p:ext uri="{BB962C8B-B14F-4D97-AF65-F5344CB8AC3E}">
-        <p14:creationId xmlns:p14="http://schemas.microsoft.com/office/powerpoint/2010/main" val="1811162563"/>
-      </p:ext>
-    </p:extLst>
   </p:cSld>
   <p:clrMapOvr>
     <a:masterClrMapping/>
@@ -11424,7 +11205,11 @@
       </a:style>
     </a:spDef>
   </a:objectDefaults>
-  <a:extraClrSchemeLst/>
+  <a:extLst>
+    <a:ext uri="{05A4C25C-085E-4340-85A3-A5531E510DB2}">
+      <thm15:themeFamily xmlns:thm15="http://schemas.microsoft.com/office/thememl/2012/main" name="Office Theme" id="{62F939B6-93AF-4DB8-9C6B-D6C7DFDC589F}" vid="{4A3C46E8-61CC-4603-A589-7422A47A8E4A}"/>
+    </a:ext>
+  </a:extLst>
 </a:theme>
 </file>
 
@@ -11648,7 +11433,10 @@
       </a:bgFillStyleLst>
     </a:fmtScheme>
   </a:themeElements>
-  <a:objectDefaults/>
-  <a:extraClrSchemeLst/>
+  <a:extLst>
+    <a:ext uri="{05A4C25C-085E-4340-85A3-A5531E510DB2}">
+      <thm15:themeFamily xmlns:thm15="http://schemas.microsoft.com/office/thememl/2012/main" name="Office Theme" id="{62F939B6-93AF-4DB8-9C6B-D6C7DFDC589F}" vid="{4A3C46E8-61CC-4603-A589-7422A47A8E4A}"/>
+    </a:ext>
+  </a:extLst>
 </a:theme>
 </file>